--- a/202660/EMR_BigData_PySpark_ML_FINAL.pptx
+++ b/202660/EMR_BigData_PySpark_ML_FINAL.pptx
@@ -37429,7 +37429,7 @@
               <a:buNone/>
             </a:pPr>
             <a:r>
-              <a:rPr lang="en-US" sz="1100">
+              <a:rPr lang="en-US" sz="1100" dirty="0">
                 <a:solidFill>
                   <a:srgbClr val="D9EEEF"/>
                 </a:solidFill>
@@ -37437,9 +37437,42 @@
                 <a:ea typeface="Courier New" pitchFamily="34" charset="-122"/>
                 <a:cs typeface="Courier New" pitchFamily="34" charset="-120"/>
               </a:rPr>
-              <a:t>from pyspark.sql import SparkSession</a:t>
-            </a:r>
-            <a:endParaRPr lang="en-US" sz="1100"/>
+              <a:t>from </a:t>
+            </a:r>
+            <a:r>
+              <a:rPr lang="en-US" sz="1100" dirty="0" err="1">
+                <a:solidFill>
+                  <a:srgbClr val="D9EEEF"/>
+                </a:solidFill>
+                <a:latin typeface="Courier New" pitchFamily="34" charset="0"/>
+                <a:ea typeface="Courier New" pitchFamily="34" charset="-122"/>
+                <a:cs typeface="Courier New" pitchFamily="34" charset="-120"/>
+              </a:rPr>
+              <a:t>pyspark.sql</a:t>
+            </a:r>
+            <a:r>
+              <a:rPr lang="en-US" sz="1100" dirty="0">
+                <a:solidFill>
+                  <a:srgbClr val="D9EEEF"/>
+                </a:solidFill>
+                <a:latin typeface="Courier New" pitchFamily="34" charset="0"/>
+                <a:ea typeface="Courier New" pitchFamily="34" charset="-122"/>
+                <a:cs typeface="Courier New" pitchFamily="34" charset="-120"/>
+              </a:rPr>
+              <a:t> import </a:t>
+            </a:r>
+            <a:r>
+              <a:rPr lang="en-US" sz="1100" dirty="0" err="1">
+                <a:solidFill>
+                  <a:srgbClr val="D9EEEF"/>
+                </a:solidFill>
+                <a:latin typeface="Courier New" pitchFamily="34" charset="0"/>
+                <a:ea typeface="Courier New" pitchFamily="34" charset="-122"/>
+                <a:cs typeface="Courier New" pitchFamily="34" charset="-120"/>
+              </a:rPr>
+              <a:t>SparkSession</a:t>
+            </a:r>
+            <a:endParaRPr lang="en-US" sz="1100" dirty="0"/>
           </a:p>
           <a:p>
             <a:pPr marL="0" indent="0">
@@ -37449,7 +37482,7 @@
               <a:buNone/>
             </a:pPr>
             <a:r>
-              <a:rPr lang="en-US" sz="1100">
+              <a:rPr lang="en-US" sz="1100" dirty="0">
                 <a:solidFill>
                   <a:srgbClr val="D9EEEF"/>
                 </a:solidFill>
@@ -37459,7 +37492,7 @@
               </a:rPr>
               <a:t>from pyspark.ml import Pipeline</a:t>
             </a:r>
-            <a:endParaRPr lang="en-US" sz="1100"/>
+            <a:endParaRPr lang="en-US" sz="1100" dirty="0"/>
           </a:p>
           <a:p>
             <a:pPr marL="0" indent="0">
@@ -37469,7 +37502,7 @@
               <a:buNone/>
             </a:pPr>
             <a:r>
-              <a:rPr lang="en-US" sz="1100">
+              <a:rPr lang="en-US" sz="1100" dirty="0">
                 <a:solidFill>
                   <a:srgbClr val="D9EEEF"/>
                 </a:solidFill>
@@ -37477,9 +37510,64 @@
                 <a:ea typeface="Courier New" pitchFamily="34" charset="-122"/>
                 <a:cs typeface="Courier New" pitchFamily="34" charset="-120"/>
               </a:rPr>
-              <a:t>from pyspark.ml.feature import StringIndexer, VectorAssembler</a:t>
-            </a:r>
-            <a:endParaRPr lang="en-US" sz="1100"/>
+              <a:t>from </a:t>
+            </a:r>
+            <a:r>
+              <a:rPr lang="en-US" sz="1100" dirty="0" err="1">
+                <a:solidFill>
+                  <a:srgbClr val="D9EEEF"/>
+                </a:solidFill>
+                <a:latin typeface="Courier New" pitchFamily="34" charset="0"/>
+                <a:ea typeface="Courier New" pitchFamily="34" charset="-122"/>
+                <a:cs typeface="Courier New" pitchFamily="34" charset="-120"/>
+              </a:rPr>
+              <a:t>pyspark.ml.feature</a:t>
+            </a:r>
+            <a:r>
+              <a:rPr lang="en-US" sz="1100" dirty="0">
+                <a:solidFill>
+                  <a:srgbClr val="D9EEEF"/>
+                </a:solidFill>
+                <a:latin typeface="Courier New" pitchFamily="34" charset="0"/>
+                <a:ea typeface="Courier New" pitchFamily="34" charset="-122"/>
+                <a:cs typeface="Courier New" pitchFamily="34" charset="-120"/>
+              </a:rPr>
+              <a:t> import </a:t>
+            </a:r>
+            <a:r>
+              <a:rPr lang="en-US" sz="1100" dirty="0" err="1">
+                <a:solidFill>
+                  <a:srgbClr val="D9EEEF"/>
+                </a:solidFill>
+                <a:latin typeface="Courier New" pitchFamily="34" charset="0"/>
+                <a:ea typeface="Courier New" pitchFamily="34" charset="-122"/>
+                <a:cs typeface="Courier New" pitchFamily="34" charset="-120"/>
+              </a:rPr>
+              <a:t>StringIndexer</a:t>
+            </a:r>
+            <a:r>
+              <a:rPr lang="en-US" sz="1100" dirty="0">
+                <a:solidFill>
+                  <a:srgbClr val="D9EEEF"/>
+                </a:solidFill>
+                <a:latin typeface="Courier New" pitchFamily="34" charset="0"/>
+                <a:ea typeface="Courier New" pitchFamily="34" charset="-122"/>
+                <a:cs typeface="Courier New" pitchFamily="34" charset="-120"/>
+              </a:rPr>
+              <a:t>, </a:t>
+            </a:r>
+            <a:r>
+              <a:rPr lang="en-US" sz="1100" dirty="0" err="1">
+                <a:solidFill>
+                  <a:srgbClr val="D9EEEF"/>
+                </a:solidFill>
+                <a:latin typeface="Courier New" pitchFamily="34" charset="0"/>
+                <a:ea typeface="Courier New" pitchFamily="34" charset="-122"/>
+                <a:cs typeface="Courier New" pitchFamily="34" charset="-120"/>
+              </a:rPr>
+              <a:t>VectorAssembler</a:t>
+            </a:r>
+            <a:endParaRPr lang="en-US" sz="1100" dirty="0"/>
           </a:p>
           <a:p>
             <a:pPr marL="0" indent="0">
@@ -37489,7 +37577,7 @@
               <a:buNone/>
             </a:pPr>
             <a:r>
-              <a:rPr lang="en-US" sz="1100">
+              <a:rPr lang="en-US" sz="1100" dirty="0">
                 <a:solidFill>
                   <a:srgbClr val="D9EEEF"/>
                 </a:solidFill>
@@ -37497,9 +37585,42 @@
                 <a:ea typeface="Courier New" pitchFamily="34" charset="-122"/>
                 <a:cs typeface="Courier New" pitchFamily="34" charset="-120"/>
               </a:rPr>
-              <a:t>from pyspark.ml.regression import RandomForestRegressor</a:t>
-            </a:r>
-            <a:endParaRPr lang="en-US" sz="1100"/>
+              <a:t>from </a:t>
+            </a:r>
+            <a:r>
+              <a:rPr lang="en-US" sz="1100" dirty="0" err="1">
+                <a:solidFill>
+                  <a:srgbClr val="D9EEEF"/>
+                </a:solidFill>
+                <a:latin typeface="Courier New" pitchFamily="34" charset="0"/>
+                <a:ea typeface="Courier New" pitchFamily="34" charset="-122"/>
+                <a:cs typeface="Courier New" pitchFamily="34" charset="-120"/>
+              </a:rPr>
+              <a:t>pyspark.ml.regression</a:t>
+            </a:r>
+            <a:r>
+              <a:rPr lang="en-US" sz="1100" dirty="0">
+                <a:solidFill>
+                  <a:srgbClr val="D9EEEF"/>
+                </a:solidFill>
+                <a:latin typeface="Courier New" pitchFamily="34" charset="0"/>
+                <a:ea typeface="Courier New" pitchFamily="34" charset="-122"/>
+                <a:cs typeface="Courier New" pitchFamily="34" charset="-120"/>
+              </a:rPr>
+              <a:t> import </a:t>
+            </a:r>
+            <a:r>
+              <a:rPr lang="en-US" sz="1100" dirty="0" err="1">
+                <a:solidFill>
+                  <a:srgbClr val="D9EEEF"/>
+                </a:solidFill>
+                <a:latin typeface="Courier New" pitchFamily="34" charset="0"/>
+                <a:ea typeface="Courier New" pitchFamily="34" charset="-122"/>
+                <a:cs typeface="Courier New" pitchFamily="34" charset="-120"/>
+              </a:rPr>
+              <a:t>RandomForestRegressor</a:t>
+            </a:r>
+            <a:endParaRPr lang="en-US" sz="1100" dirty="0"/>
           </a:p>
           <a:p>
             <a:pPr marL="0" indent="0">
@@ -37509,7 +37630,7 @@
               <a:buNone/>
             </a:pPr>
             <a:r>
-              <a:rPr lang="en-US" sz="1100">
+              <a:rPr lang="en-US" sz="1100" dirty="0">
                 <a:solidFill>
                   <a:srgbClr val="D9EEEF"/>
                 </a:solidFill>
@@ -37517,9 +37638,42 @@
                 <a:ea typeface="Courier New" pitchFamily="34" charset="-122"/>
                 <a:cs typeface="Courier New" pitchFamily="34" charset="-120"/>
               </a:rPr>
-              <a:t>from pyspark.ml.evaluation import RegressionEvaluator</a:t>
-            </a:r>
-            <a:endParaRPr lang="en-US" sz="1100"/>
+              <a:t>from </a:t>
+            </a:r>
+            <a:r>
+              <a:rPr lang="en-US" sz="1100" dirty="0" err="1">
+                <a:solidFill>
+                  <a:srgbClr val="D9EEEF"/>
+                </a:solidFill>
+                <a:latin typeface="Courier New" pitchFamily="34" charset="0"/>
+                <a:ea typeface="Courier New" pitchFamily="34" charset="-122"/>
+                <a:cs typeface="Courier New" pitchFamily="34" charset="-120"/>
+              </a:rPr>
+              <a:t>pyspark.ml.evaluation</a:t>
+            </a:r>
+            <a:r>
+              <a:rPr lang="en-US" sz="1100" dirty="0">
+                <a:solidFill>
+                  <a:srgbClr val="D9EEEF"/>
+                </a:solidFill>
+                <a:latin typeface="Courier New" pitchFamily="34" charset="0"/>
+                <a:ea typeface="Courier New" pitchFamily="34" charset="-122"/>
+                <a:cs typeface="Courier New" pitchFamily="34" charset="-120"/>
+              </a:rPr>
+              <a:t> import </a:t>
+            </a:r>
+            <a:r>
+              <a:rPr lang="en-US" sz="1100" dirty="0" err="1">
+                <a:solidFill>
+                  <a:srgbClr val="D9EEEF"/>
+                </a:solidFill>
+                <a:latin typeface="Courier New" pitchFamily="34" charset="0"/>
+                <a:ea typeface="Courier New" pitchFamily="34" charset="-122"/>
+                <a:cs typeface="Courier New" pitchFamily="34" charset="-120"/>
+              </a:rPr>
+              <a:t>RegressionEvaluator</a:t>
+            </a:r>
+            <a:endParaRPr lang="en-US" sz="1100" dirty="0"/>
           </a:p>
           <a:p>
             <a:pPr marL="0" indent="0">
@@ -37528,7 +37682,7 @@
               </a:lnSpc>
               <a:buNone/>
             </a:pPr>
-            <a:endParaRPr lang="en-US" sz="1100"/>
+            <a:endParaRPr lang="en-US" sz="1100" dirty="0"/>
           </a:p>
           <a:p>
             <a:pPr marL="0" indent="0">
@@ -37538,7 +37692,7 @@
               <a:buNone/>
             </a:pPr>
             <a:r>
-              <a:rPr lang="en-US" sz="1100">
+              <a:rPr lang="en-US" sz="1100" dirty="0" err="1">
                 <a:solidFill>
                   <a:srgbClr val="D9EEEF"/>
                 </a:solidFill>
@@ -37546,9 +37700,20 @@
                 <a:ea typeface="Courier New" pitchFamily="34" charset="-122"/>
                 <a:cs typeface="Courier New" pitchFamily="34" charset="-120"/>
               </a:rPr>
-              <a:t>url = "https://raw.githubusercontent.com/.../Peritazgo.csv"</a:t>
-            </a:r>
-            <a:endParaRPr lang="en-US" sz="1100"/>
+              <a:t>url</a:t>
+            </a:r>
+            <a:r>
+              <a:rPr lang="en-US" sz="1100" dirty="0">
+                <a:solidFill>
+                  <a:srgbClr val="D9EEEF"/>
+                </a:solidFill>
+                <a:latin typeface="Courier New" pitchFamily="34" charset="0"/>
+                <a:ea typeface="Courier New" pitchFamily="34" charset="-122"/>
+                <a:cs typeface="Courier New" pitchFamily="34" charset="-120"/>
+              </a:rPr>
+              <a:t> = "https://raw.githubusercontent.com/.../Peritazgo.csv"</a:t>
+            </a:r>
+            <a:endParaRPr lang="en-US" sz="1100" dirty="0"/>
           </a:p>
           <a:p>
             <a:pPr marL="0" indent="0">
@@ -37558,7 +37723,7 @@
               <a:buNone/>
             </a:pPr>
             <a:r>
-              <a:rPr lang="en-US" sz="1100">
+              <a:rPr lang="en-US" sz="1100" dirty="0" err="1">
                 <a:solidFill>
                   <a:srgbClr val="D9EEEF"/>
                 </a:solidFill>
@@ -37566,9 +37731,86 @@
                 <a:ea typeface="Courier New" pitchFamily="34" charset="-122"/>
                 <a:cs typeface="Courier New" pitchFamily="34" charset="-120"/>
               </a:rPr>
-              <a:t>df = spark.read.csv(url, sep=";", header=True, inferSchema=True)</a:t>
-            </a:r>
-            <a:endParaRPr lang="en-US" sz="1100"/>
+              <a:t>df</a:t>
+            </a:r>
+            <a:r>
+              <a:rPr lang="en-US" sz="1100" dirty="0">
+                <a:solidFill>
+                  <a:srgbClr val="D9EEEF"/>
+                </a:solidFill>
+                <a:latin typeface="Courier New" pitchFamily="34" charset="0"/>
+                <a:ea typeface="Courier New" pitchFamily="34" charset="-122"/>
+                <a:cs typeface="Courier New" pitchFamily="34" charset="-120"/>
+              </a:rPr>
+              <a:t> = spark.read.csv(</a:t>
+            </a:r>
+            <a:r>
+              <a:rPr lang="en-US" sz="1100" dirty="0" err="1">
+                <a:solidFill>
+                  <a:srgbClr val="D9EEEF"/>
+                </a:solidFill>
+                <a:latin typeface="Courier New" pitchFamily="34" charset="0"/>
+                <a:ea typeface="Courier New" pitchFamily="34" charset="-122"/>
+                <a:cs typeface="Courier New" pitchFamily="34" charset="-120"/>
+              </a:rPr>
+              <a:t>url</a:t>
+            </a:r>
+            <a:r>
+              <a:rPr lang="en-US" sz="1100" dirty="0">
+                <a:solidFill>
+                  <a:srgbClr val="D9EEEF"/>
+                </a:solidFill>
+                <a:latin typeface="Courier New" pitchFamily="34" charset="0"/>
+                <a:ea typeface="Courier New" pitchFamily="34" charset="-122"/>
+                <a:cs typeface="Courier New" pitchFamily="34" charset="-120"/>
+              </a:rPr>
+              <a:t>, </a:t>
+            </a:r>
+            <a:r>
+              <a:rPr lang="en-US" sz="1100" dirty="0" err="1">
+                <a:solidFill>
+                  <a:srgbClr val="D9EEEF"/>
+                </a:solidFill>
+                <a:latin typeface="Courier New" pitchFamily="34" charset="0"/>
+                <a:ea typeface="Courier New" pitchFamily="34" charset="-122"/>
+                <a:cs typeface="Courier New" pitchFamily="34" charset="-120"/>
+              </a:rPr>
+              <a:t>sep</a:t>
+            </a:r>
+            <a:r>
+              <a:rPr lang="en-US" sz="1100" dirty="0">
+                <a:solidFill>
+                  <a:srgbClr val="D9EEEF"/>
+                </a:solidFill>
+                <a:latin typeface="Courier New" pitchFamily="34" charset="0"/>
+                <a:ea typeface="Courier New" pitchFamily="34" charset="-122"/>
+                <a:cs typeface="Courier New" pitchFamily="34" charset="-120"/>
+              </a:rPr>
+              <a:t>=";", header=True, </a:t>
+            </a:r>
+            <a:r>
+              <a:rPr lang="en-US" sz="1100" dirty="0" err="1">
+                <a:solidFill>
+                  <a:srgbClr val="D9EEEF"/>
+                </a:solidFill>
+                <a:latin typeface="Courier New" pitchFamily="34" charset="0"/>
+                <a:ea typeface="Courier New" pitchFamily="34" charset="-122"/>
+                <a:cs typeface="Courier New" pitchFamily="34" charset="-120"/>
+              </a:rPr>
+              <a:t>inferSchema</a:t>
+            </a:r>
+            <a:r>
+              <a:rPr lang="en-US" sz="1100" dirty="0">
+                <a:solidFill>
+                  <a:srgbClr val="D9EEEF"/>
+                </a:solidFill>
+                <a:latin typeface="Courier New" pitchFamily="34" charset="0"/>
+                <a:ea typeface="Courier New" pitchFamily="34" charset="-122"/>
+                <a:cs typeface="Courier New" pitchFamily="34" charset="-120"/>
+              </a:rPr>
+              <a:t>=True)</a:t>
+            </a:r>
+            <a:endParaRPr lang="en-US" sz="1100" dirty="0"/>
           </a:p>
           <a:p>
             <a:pPr marL="0" indent="0">
@@ -37578,7 +37820,7 @@
               <a:buNone/>
             </a:pPr>
             <a:r>
-              <a:rPr lang="en-US" sz="1100">
+              <a:rPr lang="en-US" sz="1100" dirty="0" err="1">
                 <a:solidFill>
                   <a:srgbClr val="D9EEEF"/>
                 </a:solidFill>
@@ -37586,9 +37828,108 @@
                 <a:ea typeface="Courier New" pitchFamily="34" charset="-122"/>
                 <a:cs typeface="Courier New" pitchFamily="34" charset="-120"/>
               </a:rPr>
-              <a:t>df = df.dropna(subset=["Precio","habitaciones","AreaCons","Distancia"])</a:t>
-            </a:r>
-            <a:endParaRPr lang="en-US" sz="1100"/>
+              <a:t>df</a:t>
+            </a:r>
+            <a:r>
+              <a:rPr lang="en-US" sz="1100" dirty="0">
+                <a:solidFill>
+                  <a:srgbClr val="D9EEEF"/>
+                </a:solidFill>
+                <a:latin typeface="Courier New" pitchFamily="34" charset="0"/>
+                <a:ea typeface="Courier New" pitchFamily="34" charset="-122"/>
+                <a:cs typeface="Courier New" pitchFamily="34" charset="-120"/>
+              </a:rPr>
+              <a:t> = </a:t>
+            </a:r>
+            <a:r>
+              <a:rPr lang="en-US" sz="1100" dirty="0" err="1">
+                <a:solidFill>
+                  <a:srgbClr val="D9EEEF"/>
+                </a:solidFill>
+                <a:latin typeface="Courier New" pitchFamily="34" charset="0"/>
+                <a:ea typeface="Courier New" pitchFamily="34" charset="-122"/>
+                <a:cs typeface="Courier New" pitchFamily="34" charset="-120"/>
+              </a:rPr>
+              <a:t>df.dropna</a:t>
+            </a:r>
+            <a:r>
+              <a:rPr lang="en-US" sz="1100" dirty="0">
+                <a:solidFill>
+                  <a:srgbClr val="D9EEEF"/>
+                </a:solidFill>
+                <a:latin typeface="Courier New" pitchFamily="34" charset="0"/>
+                <a:ea typeface="Courier New" pitchFamily="34" charset="-122"/>
+                <a:cs typeface="Courier New" pitchFamily="34" charset="-120"/>
+              </a:rPr>
+              <a:t>(subset=["</a:t>
+            </a:r>
+            <a:r>
+              <a:rPr lang="en-US" sz="1100" dirty="0" err="1">
+                <a:solidFill>
+                  <a:srgbClr val="D9EEEF"/>
+                </a:solidFill>
+                <a:latin typeface="Courier New" pitchFamily="34" charset="0"/>
+                <a:ea typeface="Courier New" pitchFamily="34" charset="-122"/>
+                <a:cs typeface="Courier New" pitchFamily="34" charset="-120"/>
+              </a:rPr>
+              <a:t>Precio</a:t>
+            </a:r>
+            <a:r>
+              <a:rPr lang="en-US" sz="1100" dirty="0">
+                <a:solidFill>
+                  <a:srgbClr val="D9EEEF"/>
+                </a:solidFill>
+                <a:latin typeface="Courier New" pitchFamily="34" charset="0"/>
+                <a:ea typeface="Courier New" pitchFamily="34" charset="-122"/>
+                <a:cs typeface="Courier New" pitchFamily="34" charset="-120"/>
+              </a:rPr>
+              <a:t>","</a:t>
+            </a:r>
+            <a:r>
+              <a:rPr lang="en-US" sz="1100" dirty="0" err="1">
+                <a:solidFill>
+                  <a:srgbClr val="D9EEEF"/>
+                </a:solidFill>
+                <a:latin typeface="Courier New" pitchFamily="34" charset="0"/>
+                <a:ea typeface="Courier New" pitchFamily="34" charset="-122"/>
+                <a:cs typeface="Courier New" pitchFamily="34" charset="-120"/>
+              </a:rPr>
+              <a:t>habitaciones</a:t>
+            </a:r>
+            <a:r>
+              <a:rPr lang="en-US" sz="1100" dirty="0">
+                <a:solidFill>
+                  <a:srgbClr val="D9EEEF"/>
+                </a:solidFill>
+                <a:latin typeface="Courier New" pitchFamily="34" charset="0"/>
+                <a:ea typeface="Courier New" pitchFamily="34" charset="-122"/>
+                <a:cs typeface="Courier New" pitchFamily="34" charset="-120"/>
+              </a:rPr>
+              <a:t>","</a:t>
+            </a:r>
+            <a:r>
+              <a:rPr lang="en-US" sz="1100" dirty="0" err="1">
+                <a:solidFill>
+                  <a:srgbClr val="D9EEEF"/>
+                </a:solidFill>
+                <a:latin typeface="Courier New" pitchFamily="34" charset="0"/>
+                <a:ea typeface="Courier New" pitchFamily="34" charset="-122"/>
+                <a:cs typeface="Courier New" pitchFamily="34" charset="-120"/>
+              </a:rPr>
+              <a:t>AreaCons</a:t>
+            </a:r>
+            <a:r>
+              <a:rPr lang="en-US" sz="1100" dirty="0">
+                <a:solidFill>
+                  <a:srgbClr val="D9EEEF"/>
+                </a:solidFill>
+                <a:latin typeface="Courier New" pitchFamily="34" charset="0"/>
+                <a:ea typeface="Courier New" pitchFamily="34" charset="-122"/>
+                <a:cs typeface="Courier New" pitchFamily="34" charset="-120"/>
+              </a:rPr>
+              <a:t>","Distancia"])</a:t>
+            </a:r>
+            <a:endParaRPr lang="en-US" sz="1100" dirty="0"/>
           </a:p>
           <a:p>
             <a:pPr marL="0" indent="0">
@@ -37597,7 +37938,7 @@
               </a:lnSpc>
               <a:buNone/>
             </a:pPr>
-            <a:endParaRPr lang="en-US" sz="1100"/>
+            <a:endParaRPr lang="en-US" sz="1100" dirty="0"/>
           </a:p>
           <a:p>
             <a:pPr marL="0" indent="0">
@@ -37607,7 +37948,7 @@
               <a:buNone/>
             </a:pPr>
             <a:r>
-              <a:rPr lang="en-US" sz="1100">
+              <a:rPr lang="en-US" sz="1100" dirty="0">
                 <a:solidFill>
                   <a:srgbClr val="D9EEEF"/>
                 </a:solidFill>
@@ -37615,9 +37956,119 @@
                 <a:ea typeface="Courier New" pitchFamily="34" charset="-122"/>
                 <a:cs typeface="Courier New" pitchFamily="34" charset="-120"/>
               </a:rPr>
-              <a:t>indexer = StringIndexer(inputCol="Region", outputCol="RegionIdx", handleInvalid="keep")</a:t>
-            </a:r>
-            <a:endParaRPr lang="en-US" sz="1100"/>
+              <a:t>indexer = </a:t>
+            </a:r>
+            <a:r>
+              <a:rPr lang="en-US" sz="1100" dirty="0" err="1">
+                <a:solidFill>
+                  <a:srgbClr val="D9EEEF"/>
+                </a:solidFill>
+                <a:latin typeface="Courier New" pitchFamily="34" charset="0"/>
+                <a:ea typeface="Courier New" pitchFamily="34" charset="-122"/>
+                <a:cs typeface="Courier New" pitchFamily="34" charset="-120"/>
+              </a:rPr>
+              <a:t>StringIndexer</a:t>
+            </a:r>
+            <a:r>
+              <a:rPr lang="en-US" sz="1100" dirty="0">
+                <a:solidFill>
+                  <a:srgbClr val="D9EEEF"/>
+                </a:solidFill>
+                <a:latin typeface="Courier New" pitchFamily="34" charset="0"/>
+                <a:ea typeface="Courier New" pitchFamily="34" charset="-122"/>
+                <a:cs typeface="Courier New" pitchFamily="34" charset="-120"/>
+              </a:rPr>
+              <a:t>(</a:t>
+            </a:r>
+            <a:r>
+              <a:rPr lang="en-US" sz="1100" dirty="0" err="1">
+                <a:solidFill>
+                  <a:srgbClr val="D9EEEF"/>
+                </a:solidFill>
+                <a:latin typeface="Courier New" pitchFamily="34" charset="0"/>
+                <a:ea typeface="Courier New" pitchFamily="34" charset="-122"/>
+                <a:cs typeface="Courier New" pitchFamily="34" charset="-120"/>
+              </a:rPr>
+              <a:t>inputCol</a:t>
+            </a:r>
+            <a:r>
+              <a:rPr lang="en-US" sz="1100" dirty="0">
+                <a:solidFill>
+                  <a:srgbClr val="D9EEEF"/>
+                </a:solidFill>
+                <a:latin typeface="Courier New" pitchFamily="34" charset="0"/>
+                <a:ea typeface="Courier New" pitchFamily="34" charset="-122"/>
+                <a:cs typeface="Courier New" pitchFamily="34" charset="-120"/>
+              </a:rPr>
+              <a:t>="Region", </a:t>
+            </a:r>
+            <a:r>
+              <a:rPr lang="en-US" sz="1100" dirty="0" err="1">
+                <a:solidFill>
+                  <a:srgbClr val="D9EEEF"/>
+                </a:solidFill>
+                <a:latin typeface="Courier New" pitchFamily="34" charset="0"/>
+                <a:ea typeface="Courier New" pitchFamily="34" charset="-122"/>
+                <a:cs typeface="Courier New" pitchFamily="34" charset="-120"/>
+              </a:rPr>
+              <a:t>outputCol</a:t>
+            </a:r>
+            <a:r>
+              <a:rPr lang="en-US" sz="1100" dirty="0">
+                <a:solidFill>
+                  <a:srgbClr val="D9EEEF"/>
+                </a:solidFill>
+                <a:latin typeface="Courier New" pitchFamily="34" charset="0"/>
+                <a:ea typeface="Courier New" pitchFamily="34" charset="-122"/>
+                <a:cs typeface="Courier New" pitchFamily="34" charset="-120"/>
+              </a:rPr>
+              <a:t>="</a:t>
+            </a:r>
+            <a:r>
+              <a:rPr lang="en-US" sz="1100" dirty="0" err="1">
+                <a:solidFill>
+                  <a:srgbClr val="D9EEEF"/>
+                </a:solidFill>
+                <a:latin typeface="Courier New" pitchFamily="34" charset="0"/>
+                <a:ea typeface="Courier New" pitchFamily="34" charset="-122"/>
+                <a:cs typeface="Courier New" pitchFamily="34" charset="-120"/>
+              </a:rPr>
+              <a:t>RegionIdx</a:t>
+            </a:r>
+            <a:r>
+              <a:rPr lang="en-US" sz="1100" dirty="0">
+                <a:solidFill>
+                  <a:srgbClr val="D9EEEF"/>
+                </a:solidFill>
+                <a:latin typeface="Courier New" pitchFamily="34" charset="0"/>
+                <a:ea typeface="Courier New" pitchFamily="34" charset="-122"/>
+                <a:cs typeface="Courier New" pitchFamily="34" charset="-120"/>
+              </a:rPr>
+              <a:t>", </a:t>
+            </a:r>
+            <a:r>
+              <a:rPr lang="en-US" sz="1100" dirty="0" err="1">
+                <a:solidFill>
+                  <a:srgbClr val="D9EEEF"/>
+                </a:solidFill>
+                <a:latin typeface="Courier New" pitchFamily="34" charset="0"/>
+                <a:ea typeface="Courier New" pitchFamily="34" charset="-122"/>
+                <a:cs typeface="Courier New" pitchFamily="34" charset="-120"/>
+              </a:rPr>
+              <a:t>handleInvalid</a:t>
+            </a:r>
+            <a:r>
+              <a:rPr lang="en-US" sz="1100" dirty="0">
+                <a:solidFill>
+                  <a:srgbClr val="D9EEEF"/>
+                </a:solidFill>
+                <a:latin typeface="Courier New" pitchFamily="34" charset="0"/>
+                <a:ea typeface="Courier New" pitchFamily="34" charset="-122"/>
+                <a:cs typeface="Courier New" pitchFamily="34" charset="-120"/>
+              </a:rPr>
+              <a:t>="keep")</a:t>
+            </a:r>
+            <a:endParaRPr lang="en-US" sz="1100" dirty="0"/>
           </a:p>
           <a:p>
             <a:pPr marL="0" indent="0">
@@ -37627,7 +38078,7 @@
               <a:buNone/>
             </a:pPr>
             <a:r>
-              <a:rPr lang="en-US" sz="1100">
+              <a:rPr lang="en-US" sz="1100" dirty="0">
                 <a:solidFill>
                   <a:srgbClr val="D9EEEF"/>
                 </a:solidFill>
@@ -37637,7 +38088,7 @@
               </a:rPr>
               <a:t>cols = ["habitaciones","Banos","Carros","AreaCons","Distancia","RegionIdx"]</a:t>
             </a:r>
-            <a:endParaRPr lang="en-US" sz="1100"/>
+            <a:endParaRPr lang="en-US" sz="1100" dirty="0"/>
           </a:p>
           <a:p>
             <a:pPr marL="0" indent="0">
@@ -37647,7 +38098,7 @@
               <a:buNone/>
             </a:pPr>
             <a:r>
-              <a:rPr lang="en-US" sz="1100">
+              <a:rPr lang="en-US" sz="1100" dirty="0">
                 <a:solidFill>
                   <a:srgbClr val="D9EEEF"/>
                 </a:solidFill>
@@ -37655,9 +38106,75 @@
                 <a:ea typeface="Courier New" pitchFamily="34" charset="-122"/>
                 <a:cs typeface="Courier New" pitchFamily="34" charset="-120"/>
               </a:rPr>
-              <a:t>assembler = VectorAssembler(inputCols=cols, outputCol="features")</a:t>
-            </a:r>
-            <a:endParaRPr lang="en-US" sz="1100"/>
+              <a:t>assembler = </a:t>
+            </a:r>
+            <a:r>
+              <a:rPr lang="en-US" sz="1100" dirty="0" err="1">
+                <a:solidFill>
+                  <a:srgbClr val="D9EEEF"/>
+                </a:solidFill>
+                <a:latin typeface="Courier New" pitchFamily="34" charset="0"/>
+                <a:ea typeface="Courier New" pitchFamily="34" charset="-122"/>
+                <a:cs typeface="Courier New" pitchFamily="34" charset="-120"/>
+              </a:rPr>
+              <a:t>VectorAssembler</a:t>
+            </a:r>
+            <a:r>
+              <a:rPr lang="en-US" sz="1100" dirty="0">
+                <a:solidFill>
+                  <a:srgbClr val="D9EEEF"/>
+                </a:solidFill>
+                <a:latin typeface="Courier New" pitchFamily="34" charset="0"/>
+                <a:ea typeface="Courier New" pitchFamily="34" charset="-122"/>
+                <a:cs typeface="Courier New" pitchFamily="34" charset="-120"/>
+              </a:rPr>
+              <a:t>(</a:t>
+            </a:r>
+            <a:r>
+              <a:rPr lang="en-US" sz="1100" dirty="0" err="1">
+                <a:solidFill>
+                  <a:srgbClr val="D9EEEF"/>
+                </a:solidFill>
+                <a:latin typeface="Courier New" pitchFamily="34" charset="0"/>
+                <a:ea typeface="Courier New" pitchFamily="34" charset="-122"/>
+                <a:cs typeface="Courier New" pitchFamily="34" charset="-120"/>
+              </a:rPr>
+              <a:t>inputCols</a:t>
+            </a:r>
+            <a:r>
+              <a:rPr lang="en-US" sz="1100" dirty="0">
+                <a:solidFill>
+                  <a:srgbClr val="D9EEEF"/>
+                </a:solidFill>
+                <a:latin typeface="Courier New" pitchFamily="34" charset="0"/>
+                <a:ea typeface="Courier New" pitchFamily="34" charset="-122"/>
+                <a:cs typeface="Courier New" pitchFamily="34" charset="-120"/>
+              </a:rPr>
+              <a:t>=cols, </a:t>
+            </a:r>
+            <a:r>
+              <a:rPr lang="en-US" sz="1100" dirty="0" err="1">
+                <a:solidFill>
+                  <a:srgbClr val="D9EEEF"/>
+                </a:solidFill>
+                <a:latin typeface="Courier New" pitchFamily="34" charset="0"/>
+                <a:ea typeface="Courier New" pitchFamily="34" charset="-122"/>
+                <a:cs typeface="Courier New" pitchFamily="34" charset="-120"/>
+              </a:rPr>
+              <a:t>outputCol</a:t>
+            </a:r>
+            <a:r>
+              <a:rPr lang="en-US" sz="1100" dirty="0">
+                <a:solidFill>
+                  <a:srgbClr val="D9EEEF"/>
+                </a:solidFill>
+                <a:latin typeface="Courier New" pitchFamily="34" charset="0"/>
+                <a:ea typeface="Courier New" pitchFamily="34" charset="-122"/>
+                <a:cs typeface="Courier New" pitchFamily="34" charset="-120"/>
+              </a:rPr>
+              <a:t>="features")</a:t>
+            </a:r>
+            <a:endParaRPr lang="en-US" sz="1100" dirty="0"/>
           </a:p>
           <a:p>
             <a:pPr marL="0" indent="0">
@@ -37666,7 +38183,7 @@
               </a:lnSpc>
               <a:buNone/>
             </a:pPr>
-            <a:endParaRPr lang="en-US" sz="1100"/>
+            <a:endParaRPr lang="en-US" sz="1100" dirty="0"/>
           </a:p>
           <a:p>
             <a:pPr marL="0" indent="0">
@@ -37676,7 +38193,7 @@
               <a:buNone/>
             </a:pPr>
             <a:r>
-              <a:rPr lang="en-US" sz="1100">
+              <a:rPr lang="en-US" sz="1100" dirty="0">
                 <a:solidFill>
                   <a:srgbClr val="D9EEEF"/>
                 </a:solidFill>
@@ -37684,9 +38201,31 @@
                 <a:ea typeface="Courier New" pitchFamily="34" charset="-122"/>
                 <a:cs typeface="Courier New" pitchFamily="34" charset="-120"/>
               </a:rPr>
-              <a:t>train, test = df.randomSplit([0.8, 0.2], seed=42)</a:t>
-            </a:r>
-            <a:endParaRPr lang="en-US" sz="1100"/>
+              <a:t>train, test = </a:t>
+            </a:r>
+            <a:r>
+              <a:rPr lang="en-US" sz="1100" dirty="0" err="1">
+                <a:solidFill>
+                  <a:srgbClr val="D9EEEF"/>
+                </a:solidFill>
+                <a:latin typeface="Courier New" pitchFamily="34" charset="0"/>
+                <a:ea typeface="Courier New" pitchFamily="34" charset="-122"/>
+                <a:cs typeface="Courier New" pitchFamily="34" charset="-120"/>
+              </a:rPr>
+              <a:t>df.randomSplit</a:t>
+            </a:r>
+            <a:r>
+              <a:rPr lang="en-US" sz="1100" dirty="0">
+                <a:solidFill>
+                  <a:srgbClr val="D9EEEF"/>
+                </a:solidFill>
+                <a:latin typeface="Courier New" pitchFamily="34" charset="0"/>
+                <a:ea typeface="Courier New" pitchFamily="34" charset="-122"/>
+                <a:cs typeface="Courier New" pitchFamily="34" charset="-120"/>
+              </a:rPr>
+              <a:t>([0.8, 0.2], seed=42)</a:t>
+            </a:r>
+            <a:endParaRPr lang="en-US" sz="1100" dirty="0"/>
           </a:p>
           <a:p>
             <a:pPr marL="0" indent="0">
@@ -37696,7 +38235,7 @@
               <a:buNone/>
             </a:pPr>
             <a:r>
-              <a:rPr lang="en-US" sz="1100">
+              <a:rPr lang="en-US" sz="1100" dirty="0">
                 <a:solidFill>
                   <a:srgbClr val="D9EEEF"/>
                 </a:solidFill>
@@ -37704,9 +38243,119 @@
                 <a:ea typeface="Courier New" pitchFamily="34" charset="-122"/>
                 <a:cs typeface="Courier New" pitchFamily="34" charset="-120"/>
               </a:rPr>
-              <a:t>rf = RandomForestRegressor(featuresCol="features", labelCol="Precio", numTrees=100)</a:t>
-            </a:r>
-            <a:endParaRPr lang="en-US" sz="1100"/>
+              <a:t>rf = </a:t>
+            </a:r>
+            <a:r>
+              <a:rPr lang="en-US" sz="1100" dirty="0" err="1">
+                <a:solidFill>
+                  <a:srgbClr val="D9EEEF"/>
+                </a:solidFill>
+                <a:latin typeface="Courier New" pitchFamily="34" charset="0"/>
+                <a:ea typeface="Courier New" pitchFamily="34" charset="-122"/>
+                <a:cs typeface="Courier New" pitchFamily="34" charset="-120"/>
+              </a:rPr>
+              <a:t>RandomForestRegressor</a:t>
+            </a:r>
+            <a:r>
+              <a:rPr lang="en-US" sz="1100" dirty="0">
+                <a:solidFill>
+                  <a:srgbClr val="D9EEEF"/>
+                </a:solidFill>
+                <a:latin typeface="Courier New" pitchFamily="34" charset="0"/>
+                <a:ea typeface="Courier New" pitchFamily="34" charset="-122"/>
+                <a:cs typeface="Courier New" pitchFamily="34" charset="-120"/>
+              </a:rPr>
+              <a:t>(</a:t>
+            </a:r>
+            <a:r>
+              <a:rPr lang="en-US" sz="1100" dirty="0" err="1">
+                <a:solidFill>
+                  <a:srgbClr val="D9EEEF"/>
+                </a:solidFill>
+                <a:latin typeface="Courier New" pitchFamily="34" charset="0"/>
+                <a:ea typeface="Courier New" pitchFamily="34" charset="-122"/>
+                <a:cs typeface="Courier New" pitchFamily="34" charset="-120"/>
+              </a:rPr>
+              <a:t>featuresCol</a:t>
+            </a:r>
+            <a:r>
+              <a:rPr lang="en-US" sz="1100" dirty="0">
+                <a:solidFill>
+                  <a:srgbClr val="D9EEEF"/>
+                </a:solidFill>
+                <a:latin typeface="Courier New" pitchFamily="34" charset="0"/>
+                <a:ea typeface="Courier New" pitchFamily="34" charset="-122"/>
+                <a:cs typeface="Courier New" pitchFamily="34" charset="-120"/>
+              </a:rPr>
+              <a:t>="features", </a:t>
+            </a:r>
+            <a:r>
+              <a:rPr lang="en-US" sz="1100" dirty="0" err="1">
+                <a:solidFill>
+                  <a:srgbClr val="D9EEEF"/>
+                </a:solidFill>
+                <a:latin typeface="Courier New" pitchFamily="34" charset="0"/>
+                <a:ea typeface="Courier New" pitchFamily="34" charset="-122"/>
+                <a:cs typeface="Courier New" pitchFamily="34" charset="-120"/>
+              </a:rPr>
+              <a:t>labelCol</a:t>
+            </a:r>
+            <a:r>
+              <a:rPr lang="en-US" sz="1100" dirty="0">
+                <a:solidFill>
+                  <a:srgbClr val="D9EEEF"/>
+                </a:solidFill>
+                <a:latin typeface="Courier New" pitchFamily="34" charset="0"/>
+                <a:ea typeface="Courier New" pitchFamily="34" charset="-122"/>
+                <a:cs typeface="Courier New" pitchFamily="34" charset="-120"/>
+              </a:rPr>
+              <a:t>="</a:t>
+            </a:r>
+            <a:r>
+              <a:rPr lang="en-US" sz="1100" dirty="0" err="1">
+                <a:solidFill>
+                  <a:srgbClr val="D9EEEF"/>
+                </a:solidFill>
+                <a:latin typeface="Courier New" pitchFamily="34" charset="0"/>
+                <a:ea typeface="Courier New" pitchFamily="34" charset="-122"/>
+                <a:cs typeface="Courier New" pitchFamily="34" charset="-120"/>
+              </a:rPr>
+              <a:t>Precio</a:t>
+            </a:r>
+            <a:r>
+              <a:rPr lang="en-US" sz="1100" dirty="0">
+                <a:solidFill>
+                  <a:srgbClr val="D9EEEF"/>
+                </a:solidFill>
+                <a:latin typeface="Courier New" pitchFamily="34" charset="0"/>
+                <a:ea typeface="Courier New" pitchFamily="34" charset="-122"/>
+                <a:cs typeface="Courier New" pitchFamily="34" charset="-120"/>
+              </a:rPr>
+              <a:t>", </a:t>
+            </a:r>
+            <a:r>
+              <a:rPr lang="en-US" sz="1100" dirty="0" err="1">
+                <a:solidFill>
+                  <a:srgbClr val="D9EEEF"/>
+                </a:solidFill>
+                <a:latin typeface="Courier New" pitchFamily="34" charset="0"/>
+                <a:ea typeface="Courier New" pitchFamily="34" charset="-122"/>
+                <a:cs typeface="Courier New" pitchFamily="34" charset="-120"/>
+              </a:rPr>
+              <a:t>numTrees</a:t>
+            </a:r>
+            <a:r>
+              <a:rPr lang="en-US" sz="1100" dirty="0">
+                <a:solidFill>
+                  <a:srgbClr val="D9EEEF"/>
+                </a:solidFill>
+                <a:latin typeface="Courier New" pitchFamily="34" charset="0"/>
+                <a:ea typeface="Courier New" pitchFamily="34" charset="-122"/>
+                <a:cs typeface="Courier New" pitchFamily="34" charset="-120"/>
+              </a:rPr>
+              <a:t>=100)</a:t>
+            </a:r>
+            <a:endParaRPr lang="en-US" sz="1100" dirty="0"/>
           </a:p>
           <a:p>
             <a:pPr marL="0" indent="0">
@@ -37716,7 +38365,7 @@
               <a:buNone/>
             </a:pPr>
             <a:r>
-              <a:rPr lang="en-US" sz="1100">
+              <a:rPr lang="en-US" sz="1100" dirty="0">
                 <a:solidFill>
                   <a:srgbClr val="D9EEEF"/>
                 </a:solidFill>
@@ -37726,7 +38375,7 @@
               </a:rPr>
               <a:t>pipeline = Pipeline(stages=[indexer, assembler, rf])</a:t>
             </a:r>
-            <a:endParaRPr lang="en-US" sz="1100"/>
+            <a:endParaRPr lang="en-US" sz="1100" dirty="0"/>
           </a:p>
           <a:p>
             <a:pPr marL="0" indent="0">
@@ -37736,7 +38385,7 @@
               <a:buNone/>
             </a:pPr>
             <a:r>
-              <a:rPr lang="en-US" sz="1100">
+              <a:rPr lang="en-US" sz="1100" dirty="0">
                 <a:solidFill>
                   <a:srgbClr val="D9EEEF"/>
                 </a:solidFill>
@@ -37744,9 +38393,31 @@
                 <a:ea typeface="Courier New" pitchFamily="34" charset="-122"/>
                 <a:cs typeface="Courier New" pitchFamily="34" charset="-120"/>
               </a:rPr>
-              <a:t>model = pipeline.fit(train)</a:t>
-            </a:r>
-            <a:endParaRPr lang="en-US" sz="1100"/>
+              <a:t>model = </a:t>
+            </a:r>
+            <a:r>
+              <a:rPr lang="en-US" sz="1100" dirty="0" err="1">
+                <a:solidFill>
+                  <a:srgbClr val="D9EEEF"/>
+                </a:solidFill>
+                <a:latin typeface="Courier New" pitchFamily="34" charset="0"/>
+                <a:ea typeface="Courier New" pitchFamily="34" charset="-122"/>
+                <a:cs typeface="Courier New" pitchFamily="34" charset="-120"/>
+              </a:rPr>
+              <a:t>pipeline.fit</a:t>
+            </a:r>
+            <a:r>
+              <a:rPr lang="en-US" sz="1100" dirty="0">
+                <a:solidFill>
+                  <a:srgbClr val="D9EEEF"/>
+                </a:solidFill>
+                <a:latin typeface="Courier New" pitchFamily="34" charset="0"/>
+                <a:ea typeface="Courier New" pitchFamily="34" charset="-122"/>
+                <a:cs typeface="Courier New" pitchFamily="34" charset="-120"/>
+              </a:rPr>
+              <a:t>(train)</a:t>
+            </a:r>
+            <a:endParaRPr lang="en-US" sz="1100" dirty="0"/>
           </a:p>
           <a:p>
             <a:pPr marL="0" indent="0">
@@ -37755,7 +38426,7 @@
               </a:lnSpc>
               <a:buNone/>
             </a:pPr>
-            <a:endParaRPr lang="en-US" sz="1100"/>
+            <a:endParaRPr lang="en-US" sz="1100" dirty="0"/>
           </a:p>
           <a:p>
             <a:pPr marL="0" indent="0">
@@ -37765,7 +38436,7 @@
               <a:buNone/>
             </a:pPr>
             <a:r>
-              <a:rPr lang="en-US" sz="1100">
+              <a:rPr lang="en-US" sz="1100" dirty="0">
                 <a:solidFill>
                   <a:srgbClr val="D9EEEF"/>
                 </a:solidFill>
@@ -37773,9 +38444,31 @@
                 <a:ea typeface="Courier New" pitchFamily="34" charset="-122"/>
                 <a:cs typeface="Courier New" pitchFamily="34" charset="-120"/>
               </a:rPr>
-              <a:t>predictions = model.transform(test)</a:t>
-            </a:r>
-            <a:endParaRPr lang="en-US" sz="1100"/>
+              <a:t>predictions = </a:t>
+            </a:r>
+            <a:r>
+              <a:rPr lang="en-US" sz="1100" dirty="0" err="1">
+                <a:solidFill>
+                  <a:srgbClr val="D9EEEF"/>
+                </a:solidFill>
+                <a:latin typeface="Courier New" pitchFamily="34" charset="0"/>
+                <a:ea typeface="Courier New" pitchFamily="34" charset="-122"/>
+                <a:cs typeface="Courier New" pitchFamily="34" charset="-120"/>
+              </a:rPr>
+              <a:t>model.transform</a:t>
+            </a:r>
+            <a:r>
+              <a:rPr lang="en-US" sz="1100" dirty="0">
+                <a:solidFill>
+                  <a:srgbClr val="D9EEEF"/>
+                </a:solidFill>
+                <a:latin typeface="Courier New" pitchFamily="34" charset="0"/>
+                <a:ea typeface="Courier New" pitchFamily="34" charset="-122"/>
+                <a:cs typeface="Courier New" pitchFamily="34" charset="-120"/>
+              </a:rPr>
+              <a:t>(test)</a:t>
+            </a:r>
+            <a:endParaRPr lang="en-US" sz="1100" dirty="0"/>
           </a:p>
           <a:p>
             <a:pPr marL="0" indent="0">
@@ -37785,7 +38478,7 @@
               <a:buNone/>
             </a:pPr>
             <a:r>
-              <a:rPr lang="en-US" sz="1100">
+              <a:rPr lang="en-US" sz="1100" dirty="0">
                 <a:solidFill>
                   <a:srgbClr val="D9EEEF"/>
                 </a:solidFill>
@@ -37793,9 +38486,141 @@
                 <a:ea typeface="Courier New" pitchFamily="34" charset="-122"/>
                 <a:cs typeface="Courier New" pitchFamily="34" charset="-120"/>
               </a:rPr>
-              <a:t>evaluator = RegressionEvaluator(labelCol="Precio", predictionCol="prediction", metricName="rmse")</a:t>
-            </a:r>
-            <a:endParaRPr lang="en-US" sz="1100"/>
+              <a:t>evaluator = </a:t>
+            </a:r>
+            <a:r>
+              <a:rPr lang="en-US" sz="1100" dirty="0" err="1">
+                <a:solidFill>
+                  <a:srgbClr val="D9EEEF"/>
+                </a:solidFill>
+                <a:latin typeface="Courier New" pitchFamily="34" charset="0"/>
+                <a:ea typeface="Courier New" pitchFamily="34" charset="-122"/>
+                <a:cs typeface="Courier New" pitchFamily="34" charset="-120"/>
+              </a:rPr>
+              <a:t>RegressionEvaluator</a:t>
+            </a:r>
+            <a:r>
+              <a:rPr lang="en-US" sz="1100" dirty="0">
+                <a:solidFill>
+                  <a:srgbClr val="D9EEEF"/>
+                </a:solidFill>
+                <a:latin typeface="Courier New" pitchFamily="34" charset="0"/>
+                <a:ea typeface="Courier New" pitchFamily="34" charset="-122"/>
+                <a:cs typeface="Courier New" pitchFamily="34" charset="-120"/>
+              </a:rPr>
+              <a:t>(</a:t>
+            </a:r>
+            <a:r>
+              <a:rPr lang="en-US" sz="1100" dirty="0" err="1">
+                <a:solidFill>
+                  <a:srgbClr val="D9EEEF"/>
+                </a:solidFill>
+                <a:latin typeface="Courier New" pitchFamily="34" charset="0"/>
+                <a:ea typeface="Courier New" pitchFamily="34" charset="-122"/>
+                <a:cs typeface="Courier New" pitchFamily="34" charset="-120"/>
+              </a:rPr>
+              <a:t>labelCol</a:t>
+            </a:r>
+            <a:r>
+              <a:rPr lang="en-US" sz="1100" dirty="0">
+                <a:solidFill>
+                  <a:srgbClr val="D9EEEF"/>
+                </a:solidFill>
+                <a:latin typeface="Courier New" pitchFamily="34" charset="0"/>
+                <a:ea typeface="Courier New" pitchFamily="34" charset="-122"/>
+                <a:cs typeface="Courier New" pitchFamily="34" charset="-120"/>
+              </a:rPr>
+              <a:t>="</a:t>
+            </a:r>
+            <a:r>
+              <a:rPr lang="en-US" sz="1100" dirty="0" err="1">
+                <a:solidFill>
+                  <a:srgbClr val="D9EEEF"/>
+                </a:solidFill>
+                <a:latin typeface="Courier New" pitchFamily="34" charset="0"/>
+                <a:ea typeface="Courier New" pitchFamily="34" charset="-122"/>
+                <a:cs typeface="Courier New" pitchFamily="34" charset="-120"/>
+              </a:rPr>
+              <a:t>Precio</a:t>
+            </a:r>
+            <a:r>
+              <a:rPr lang="en-US" sz="1100" dirty="0">
+                <a:solidFill>
+                  <a:srgbClr val="D9EEEF"/>
+                </a:solidFill>
+                <a:latin typeface="Courier New" pitchFamily="34" charset="0"/>
+                <a:ea typeface="Courier New" pitchFamily="34" charset="-122"/>
+                <a:cs typeface="Courier New" pitchFamily="34" charset="-120"/>
+              </a:rPr>
+              <a:t>", </a:t>
+            </a:r>
+            <a:r>
+              <a:rPr lang="en-US" sz="1100" dirty="0" err="1">
+                <a:solidFill>
+                  <a:srgbClr val="D9EEEF"/>
+                </a:solidFill>
+                <a:latin typeface="Courier New" pitchFamily="34" charset="0"/>
+                <a:ea typeface="Courier New" pitchFamily="34" charset="-122"/>
+                <a:cs typeface="Courier New" pitchFamily="34" charset="-120"/>
+              </a:rPr>
+              <a:t>predictionCol</a:t>
+            </a:r>
+            <a:r>
+              <a:rPr lang="en-US" sz="1100" dirty="0">
+                <a:solidFill>
+                  <a:srgbClr val="D9EEEF"/>
+                </a:solidFill>
+                <a:latin typeface="Courier New" pitchFamily="34" charset="0"/>
+                <a:ea typeface="Courier New" pitchFamily="34" charset="-122"/>
+                <a:cs typeface="Courier New" pitchFamily="34" charset="-120"/>
+              </a:rPr>
+              <a:t>="prediction", </a:t>
+            </a:r>
+            <a:r>
+              <a:rPr lang="en-US" sz="1100" dirty="0" err="1">
+                <a:solidFill>
+                  <a:srgbClr val="D9EEEF"/>
+                </a:solidFill>
+                <a:latin typeface="Courier New" pitchFamily="34" charset="0"/>
+                <a:ea typeface="Courier New" pitchFamily="34" charset="-122"/>
+                <a:cs typeface="Courier New" pitchFamily="34" charset="-120"/>
+              </a:rPr>
+              <a:t>metricName</a:t>
+            </a:r>
+            <a:r>
+              <a:rPr lang="en-US" sz="1100" dirty="0">
+                <a:solidFill>
+                  <a:srgbClr val="D9EEEF"/>
+                </a:solidFill>
+                <a:latin typeface="Courier New" pitchFamily="34" charset="0"/>
+                <a:ea typeface="Courier New" pitchFamily="34" charset="-122"/>
+                <a:cs typeface="Courier New" pitchFamily="34" charset="-120"/>
+              </a:rPr>
+              <a:t>="</a:t>
+            </a:r>
+            <a:r>
+              <a:rPr lang="en-US" sz="1100" dirty="0" err="1">
+                <a:solidFill>
+                  <a:srgbClr val="D9EEEF"/>
+                </a:solidFill>
+                <a:latin typeface="Courier New" pitchFamily="34" charset="0"/>
+                <a:ea typeface="Courier New" pitchFamily="34" charset="-122"/>
+                <a:cs typeface="Courier New" pitchFamily="34" charset="-120"/>
+              </a:rPr>
+              <a:t>rmse</a:t>
+            </a:r>
+            <a:r>
+              <a:rPr lang="en-US" sz="1100" dirty="0">
+                <a:solidFill>
+                  <a:srgbClr val="D9EEEF"/>
+                </a:solidFill>
+                <a:latin typeface="Courier New" pitchFamily="34" charset="0"/>
+                <a:ea typeface="Courier New" pitchFamily="34" charset="-122"/>
+                <a:cs typeface="Courier New" pitchFamily="34" charset="-120"/>
+              </a:rPr>
+              <a:t>")</a:t>
+            </a:r>
+            <a:endParaRPr lang="en-US" sz="1100" dirty="0"/>
           </a:p>
           <a:p>
             <a:pPr marL="0" indent="0">
@@ -37805,7 +38630,7 @@
               <a:buNone/>
             </a:pPr>
             <a:r>
-              <a:rPr lang="en-US" sz="1100">
+              <a:rPr lang="en-US" sz="1100" dirty="0">
                 <a:solidFill>
                   <a:srgbClr val="D9EEEF"/>
                 </a:solidFill>
@@ -37813,9 +38638,31 @@
                 <a:ea typeface="Courier New" pitchFamily="34" charset="-122"/>
                 <a:cs typeface="Courier New" pitchFamily="34" charset="-120"/>
               </a:rPr>
-              <a:t>print("RMSE:", evaluator.evaluate(predictions))</a:t>
-            </a:r>
-            <a:endParaRPr lang="en-US" sz="1100"/>
+              <a:t>print("RMSE:", </a:t>
+            </a:r>
+            <a:r>
+              <a:rPr lang="en-US" sz="1100" dirty="0" err="1">
+                <a:solidFill>
+                  <a:srgbClr val="D9EEEF"/>
+                </a:solidFill>
+                <a:latin typeface="Courier New" pitchFamily="34" charset="0"/>
+                <a:ea typeface="Courier New" pitchFamily="34" charset="-122"/>
+                <a:cs typeface="Courier New" pitchFamily="34" charset="-120"/>
+              </a:rPr>
+              <a:t>evaluator.evaluate</a:t>
+            </a:r>
+            <a:r>
+              <a:rPr lang="en-US" sz="1100" dirty="0">
+                <a:solidFill>
+                  <a:srgbClr val="D9EEEF"/>
+                </a:solidFill>
+                <a:latin typeface="Courier New" pitchFamily="34" charset="0"/>
+                <a:ea typeface="Courier New" pitchFamily="34" charset="-122"/>
+                <a:cs typeface="Courier New" pitchFamily="34" charset="-120"/>
+              </a:rPr>
+              <a:t>(predictions))</a:t>
+            </a:r>
+            <a:endParaRPr lang="en-US" sz="1100" dirty="0"/>
           </a:p>
         </p:txBody>
       </p:sp>
@@ -39236,33 +40083,106 @@
         <p:spPr>
           <a:xfrm>
             <a:off x="548640" y="786384"/>
-            <a:ext cx="11064240" cy="822960"/>
+            <a:ext cx="11064240" cy="984885"/>
           </a:xfrm>
           <a:prstGeom prst="rect">
             <a:avLst/>
           </a:prstGeom>
           <a:noFill/>
-          <a:ln/>
-        </p:spPr>
-        <p:txBody>
-          <a:bodyPr wrap="square" rtlCol="0" anchor="ctr"/>
-          <a:lstStyle/>
-          <a:p>
-            <a:pPr marL="0" indent="0" algn="l">
-              <a:buNone/>
+          <a:ln>
+            <a:noFill/>
+          </a:ln>
+        </p:spPr>
+        <p:txBody>
+          <a:bodyPr spcFirstLastPara="1" wrap="square" lIns="0" tIns="0" rIns="0" bIns="0" anchor="t" anchorCtr="0">
+            <a:spAutoFit/>
+          </a:bodyPr>
+          <a:lstStyle/>
+          <a:p>
+            <a:pPr marL="457200" indent="-228600">
+              <a:buClr>
+                <a:srgbClr val="000000"/>
+              </a:buClr>
+              <a:buSzPts val="4400"/>
             </a:pPr>
             <a:r>
-              <a:rPr lang="en-US" sz="3000" b="1">
-                <a:solidFill>
-                  <a:srgbClr val="1B2A4A"/>
-                </a:solidFill>
-                <a:latin typeface="Cambria" pitchFamily="34" charset="0"/>
-                <a:ea typeface="Cambria" pitchFamily="34" charset="-122"/>
-                <a:cs typeface="Cambria" pitchFamily="34" charset="-120"/>
-              </a:rPr>
-              <a:t>Costos, seguridad y buenas prácticas con EMR</a:t>
-            </a:r>
-            <a:endParaRPr lang="en-US" sz="3000"/>
+              <a:rPr lang="en-US" sz="3200" b="1" dirty="0">
+                <a:solidFill>
+                  <a:srgbClr val="9200EE"/>
+                </a:solidFill>
+                <a:latin typeface="Montserrat Black"/>
+                <a:sym typeface="Montserrat Black"/>
+              </a:rPr>
+              <a:t>Costos, </a:t>
+            </a:r>
+            <a:r>
+              <a:rPr lang="en-US" sz="3200" b="1" dirty="0" err="1">
+                <a:solidFill>
+                  <a:srgbClr val="9200EE"/>
+                </a:solidFill>
+                <a:latin typeface="Montserrat Black"/>
+                <a:sym typeface="Montserrat Black"/>
+              </a:rPr>
+              <a:t>seguridad</a:t>
+            </a:r>
+            <a:r>
+              <a:rPr lang="en-US" sz="3200" b="1" dirty="0">
+                <a:solidFill>
+                  <a:srgbClr val="9200EE"/>
+                </a:solidFill>
+                <a:latin typeface="Montserrat Black"/>
+                <a:sym typeface="Montserrat Black"/>
+              </a:rPr>
+              <a:t> y </a:t>
+            </a:r>
+            <a:r>
+              <a:rPr lang="en-US" sz="3200" b="1" dirty="0" err="1">
+                <a:solidFill>
+                  <a:srgbClr val="9200EE"/>
+                </a:solidFill>
+                <a:latin typeface="Montserrat Black"/>
+                <a:sym typeface="Montserrat Black"/>
+              </a:rPr>
+              <a:t>buenas</a:t>
+            </a:r>
+            <a:r>
+              <a:rPr lang="en-US" sz="3200" b="1" dirty="0">
+                <a:solidFill>
+                  <a:srgbClr val="9200EE"/>
+                </a:solidFill>
+                <a:latin typeface="Montserrat Black"/>
+                <a:sym typeface="Montserrat Black"/>
+              </a:rPr>
+              <a:t> </a:t>
+            </a:r>
+          </a:p>
+          <a:p>
+            <a:pPr marL="457200" indent="-228600">
+              <a:buClr>
+                <a:srgbClr val="000000"/>
+              </a:buClr>
+              <a:buSzPts val="4400"/>
+            </a:pPr>
+            <a:r>
+              <a:rPr lang="en-US" sz="3200" b="1" dirty="0" err="1">
+                <a:solidFill>
+                  <a:srgbClr val="9200EE"/>
+                </a:solidFill>
+                <a:latin typeface="Montserrat Black"/>
+                <a:sym typeface="Montserrat Black"/>
+              </a:rPr>
+              <a:t>prácticas</a:t>
+            </a:r>
+            <a:r>
+              <a:rPr lang="en-US" sz="3200" b="1" dirty="0">
+                <a:solidFill>
+                  <a:srgbClr val="9200EE"/>
+                </a:solidFill>
+                <a:latin typeface="Montserrat Black"/>
+                <a:sym typeface="Montserrat Black"/>
+              </a:rPr>
+              <a:t> con EMR</a:t>
+            </a:r>
           </a:p>
         </p:txBody>
       </p:sp>
@@ -40142,31 +41062,6 @@
               <a:t>19</a:t>
             </a:r>
             <a:endParaRPr lang="en-US" sz="900"/>
-          </a:p>
-        </p:txBody>
-      </p:sp>
-      <p:sp>
-        <p:nvSpPr>
-          <p:cNvPr id="23" name="Marcador de texto 22">
-            <a:extLst>
-              <a:ext uri="{FF2B5EF4-FFF2-40B4-BE49-F238E27FC236}">
-                <a16:creationId xmlns:a16="http://schemas.microsoft.com/office/drawing/2014/main" id="{58C710A4-B0BA-51DB-AB66-7DF46FE29002}"/>
-              </a:ext>
-            </a:extLst>
-          </p:cNvPr>
-          <p:cNvSpPr>
-            <a:spLocks noGrp="1"/>
-          </p:cNvSpPr>
-          <p:nvPr>
-            <p:ph type="body" idx="1"/>
-          </p:nvPr>
-        </p:nvSpPr>
-        <p:spPr/>
-        <p:txBody>
-          <a:bodyPr/>
-          <a:lstStyle/>
-          <a:p>
-            <a:endParaRPr lang="es-CO"/>
           </a:p>
         </p:txBody>
       </p:sp>
@@ -40265,7 +41160,7 @@
         </p:nvSpPr>
         <p:spPr>
           <a:xfrm>
-            <a:off x="640080" y="822960"/>
+            <a:off x="2534868" y="749808"/>
             <a:ext cx="10789920" cy="731520"/>
           </a:xfrm>
           <a:prstGeom prst="rect">
@@ -40282,14 +41177,131 @@
               <a:buNone/>
             </a:pPr>
             <a:r>
-              <a:rPr lang="en-US" sz="3200" b="1">
+              <a:rPr lang="en-US" sz="3600" b="1" dirty="0">
+                <a:solidFill>
+                  <a:srgbClr val="9200EE"/>
+                </a:solidFill>
                 <a:latin typeface="Cambria" pitchFamily="34" charset="0"/>
                 <a:ea typeface="Cambria" pitchFamily="34" charset="-122"/>
                 <a:cs typeface="Cambria" pitchFamily="34" charset="-120"/>
               </a:rPr>
-              <a:t>¿Qué te llevas de esta sesión?</a:t>
-            </a:r>
-            <a:endParaRPr lang="en-US" sz="3200"/>
+              <a:t>¿</a:t>
+            </a:r>
+            <a:r>
+              <a:rPr lang="en-US" sz="3600" b="1" dirty="0" err="1">
+                <a:solidFill>
+                  <a:srgbClr val="9200EE"/>
+                </a:solidFill>
+                <a:latin typeface="Cambria" pitchFamily="34" charset="0"/>
+                <a:ea typeface="Cambria" pitchFamily="34" charset="-122"/>
+                <a:cs typeface="Cambria" pitchFamily="34" charset="-120"/>
+              </a:rPr>
+              <a:t>Qué</a:t>
+            </a:r>
+            <a:r>
+              <a:rPr lang="en-US" sz="3600" b="1" dirty="0">
+                <a:solidFill>
+                  <a:srgbClr val="9200EE"/>
+                </a:solidFill>
+                <a:latin typeface="Cambria" pitchFamily="34" charset="0"/>
+                <a:ea typeface="Cambria" pitchFamily="34" charset="-122"/>
+                <a:cs typeface="Cambria" pitchFamily="34" charset="-120"/>
+              </a:rPr>
+              <a:t> </a:t>
+            </a:r>
+            <a:r>
+              <a:rPr lang="en-US" sz="3600" b="1" dirty="0" err="1">
+                <a:solidFill>
+                  <a:srgbClr val="9200EE"/>
+                </a:solidFill>
+                <a:latin typeface="Cambria" pitchFamily="34" charset="0"/>
+                <a:ea typeface="Cambria" pitchFamily="34" charset="-122"/>
+                <a:cs typeface="Cambria" pitchFamily="34" charset="-120"/>
+              </a:rPr>
+              <a:t>te</a:t>
+            </a:r>
+            <a:r>
+              <a:rPr lang="en-US" sz="3600" b="1" dirty="0">
+                <a:solidFill>
+                  <a:srgbClr val="9200EE"/>
+                </a:solidFill>
+                <a:latin typeface="Cambria" pitchFamily="34" charset="0"/>
+                <a:ea typeface="Cambria" pitchFamily="34" charset="-122"/>
+                <a:cs typeface="Cambria" pitchFamily="34" charset="-120"/>
+              </a:rPr>
+              <a:t> </a:t>
+            </a:r>
+            <a:r>
+              <a:rPr lang="en-US" sz="3600" b="1" dirty="0" err="1">
+                <a:solidFill>
+                  <a:srgbClr val="9200EE"/>
+                </a:solidFill>
+                <a:latin typeface="Cambria" pitchFamily="34" charset="0"/>
+                <a:ea typeface="Cambria" pitchFamily="34" charset="-122"/>
+                <a:cs typeface="Cambria" pitchFamily="34" charset="-120"/>
+              </a:rPr>
+              <a:t>llevas</a:t>
+            </a:r>
+            <a:r>
+              <a:rPr lang="en-US" sz="3600" b="1" dirty="0">
+                <a:solidFill>
+                  <a:srgbClr val="9200EE"/>
+                </a:solidFill>
+                <a:latin typeface="Cambria" pitchFamily="34" charset="0"/>
+                <a:ea typeface="Cambria" pitchFamily="34" charset="-122"/>
+                <a:cs typeface="Cambria" pitchFamily="34" charset="-120"/>
+              </a:rPr>
+              <a:t> de </a:t>
+            </a:r>
+            <a:r>
+              <a:rPr lang="en-US" sz="3600" b="1" dirty="0" err="1">
+                <a:solidFill>
+                  <a:srgbClr val="9200EE"/>
+                </a:solidFill>
+                <a:latin typeface="Cambria" pitchFamily="34" charset="0"/>
+                <a:ea typeface="Cambria" pitchFamily="34" charset="-122"/>
+                <a:cs typeface="Cambria" pitchFamily="34" charset="-120"/>
+              </a:rPr>
+              <a:t>esta</a:t>
+            </a:r>
+            <a:r>
+              <a:rPr lang="en-US" sz="3600" b="1" dirty="0">
+                <a:solidFill>
+                  <a:srgbClr val="9200EE"/>
+                </a:solidFill>
+                <a:latin typeface="Cambria" pitchFamily="34" charset="0"/>
+                <a:ea typeface="Cambria" pitchFamily="34" charset="-122"/>
+                <a:cs typeface="Cambria" pitchFamily="34" charset="-120"/>
+              </a:rPr>
+              <a:t> </a:t>
+            </a:r>
+            <a:r>
+              <a:rPr lang="en-US" sz="3600" b="1" dirty="0" err="1">
+                <a:solidFill>
+                  <a:srgbClr val="9200EE"/>
+                </a:solidFill>
+                <a:latin typeface="Cambria" pitchFamily="34" charset="0"/>
+                <a:ea typeface="Cambria" pitchFamily="34" charset="-122"/>
+                <a:cs typeface="Cambria" pitchFamily="34" charset="-120"/>
+              </a:rPr>
+              <a:t>sesión</a:t>
+            </a:r>
+            <a:r>
+              <a:rPr lang="en-US" sz="3600" b="1" dirty="0">
+                <a:solidFill>
+                  <a:srgbClr val="9200EE"/>
+                </a:solidFill>
+                <a:latin typeface="Cambria" pitchFamily="34" charset="0"/>
+                <a:ea typeface="Cambria" pitchFamily="34" charset="-122"/>
+                <a:cs typeface="Cambria" pitchFamily="34" charset="-120"/>
+              </a:rPr>
+              <a:t>?</a:t>
+            </a:r>
+            <a:endParaRPr lang="en-US" sz="3600" dirty="0">
+              <a:solidFill>
+                <a:srgbClr val="9200EE"/>
+              </a:solidFill>
+            </a:endParaRPr>
           </a:p>
         </p:txBody>
       </p:sp>
@@ -40301,7 +41313,7 @@
         </p:nvSpPr>
         <p:spPr>
           <a:xfrm>
-            <a:off x="640080" y="1828800"/>
+            <a:off x="1153212" y="1833372"/>
             <a:ext cx="365760" cy="365760"/>
           </a:xfrm>
           <a:prstGeom prst="ellipse">
@@ -40328,7 +41340,7 @@
         </p:nvSpPr>
         <p:spPr>
           <a:xfrm>
-            <a:off x="640080" y="1828800"/>
+            <a:off x="1153212" y="1833372"/>
             <a:ext cx="365760" cy="365760"/>
           </a:xfrm>
           <a:prstGeom prst="rect">
@@ -40364,7 +41376,7 @@
         </p:nvSpPr>
         <p:spPr>
           <a:xfrm>
-            <a:off x="1188720" y="1755648"/>
+            <a:off x="1676400" y="1797032"/>
             <a:ext cx="9875520" cy="512064"/>
           </a:xfrm>
           <a:prstGeom prst="rect">
@@ -40381,14 +41393,78 @@
               <a:buNone/>
             </a:pPr>
             <a:r>
-              <a:rPr lang="en-US" sz="1550">
+              <a:rPr lang="en-US" sz="1550" dirty="0">
                 <a:latin typeface="Calibri" pitchFamily="34" charset="0"/>
                 <a:ea typeface="Calibri" pitchFamily="34" charset="-122"/>
                 <a:cs typeface="Calibri" pitchFamily="34" charset="-120"/>
               </a:rPr>
-              <a:t>Por qué el Big Data exige procesamiento distribuido (Hadoop + Spark)</a:t>
-            </a:r>
-            <a:endParaRPr lang="en-US" sz="1550"/>
+              <a:t>Por </a:t>
+            </a:r>
+            <a:r>
+              <a:rPr lang="en-US" sz="1550" dirty="0" err="1">
+                <a:latin typeface="Calibri" pitchFamily="34" charset="0"/>
+                <a:ea typeface="Calibri" pitchFamily="34" charset="-122"/>
+                <a:cs typeface="Calibri" pitchFamily="34" charset="-120"/>
+              </a:rPr>
+              <a:t>qué</a:t>
+            </a:r>
+            <a:r>
+              <a:rPr lang="en-US" sz="1550" dirty="0">
+                <a:latin typeface="Calibri" pitchFamily="34" charset="0"/>
+                <a:ea typeface="Calibri" pitchFamily="34" charset="-122"/>
+                <a:cs typeface="Calibri" pitchFamily="34" charset="-120"/>
+              </a:rPr>
+              <a:t> el Big Data </a:t>
+            </a:r>
+            <a:r>
+              <a:rPr lang="en-US" sz="1550" dirty="0" err="1">
+                <a:latin typeface="Calibri" pitchFamily="34" charset="0"/>
+                <a:ea typeface="Calibri" pitchFamily="34" charset="-122"/>
+                <a:cs typeface="Calibri" pitchFamily="34" charset="-120"/>
+              </a:rPr>
+              <a:t>exige</a:t>
+            </a:r>
+            <a:r>
+              <a:rPr lang="en-US" sz="1550" dirty="0">
+                <a:latin typeface="Calibri" pitchFamily="34" charset="0"/>
+                <a:ea typeface="Calibri" pitchFamily="34" charset="-122"/>
+                <a:cs typeface="Calibri" pitchFamily="34" charset="-120"/>
+              </a:rPr>
+              <a:t> </a:t>
+            </a:r>
+            <a:r>
+              <a:rPr lang="en-US" sz="1550" dirty="0" err="1">
+                <a:latin typeface="Calibri" pitchFamily="34" charset="0"/>
+                <a:ea typeface="Calibri" pitchFamily="34" charset="-122"/>
+                <a:cs typeface="Calibri" pitchFamily="34" charset="-120"/>
+              </a:rPr>
+              <a:t>procesamiento</a:t>
+            </a:r>
+            <a:r>
+              <a:rPr lang="en-US" sz="1550" dirty="0">
+                <a:latin typeface="Calibri" pitchFamily="34" charset="0"/>
+                <a:ea typeface="Calibri" pitchFamily="34" charset="-122"/>
+                <a:cs typeface="Calibri" pitchFamily="34" charset="-120"/>
+              </a:rPr>
+              <a:t> </a:t>
+            </a:r>
+            <a:r>
+              <a:rPr lang="en-US" sz="1550" dirty="0" err="1">
+                <a:latin typeface="Calibri" pitchFamily="34" charset="0"/>
+                <a:ea typeface="Calibri" pitchFamily="34" charset="-122"/>
+                <a:cs typeface="Calibri" pitchFamily="34" charset="-120"/>
+              </a:rPr>
+              <a:t>distribuido</a:t>
+            </a:r>
+            <a:r>
+              <a:rPr lang="en-US" sz="1550" dirty="0">
+                <a:latin typeface="Calibri" pitchFamily="34" charset="0"/>
+                <a:ea typeface="Calibri" pitchFamily="34" charset="-122"/>
+                <a:cs typeface="Calibri" pitchFamily="34" charset="-120"/>
+              </a:rPr>
+              <a:t> (Hadoop + Spark)</a:t>
+            </a:r>
+            <a:endParaRPr lang="en-US" sz="1550" dirty="0"/>
           </a:p>
         </p:txBody>
       </p:sp>
@@ -40400,7 +41476,7 @@
         </p:nvSpPr>
         <p:spPr>
           <a:xfrm>
-            <a:off x="640080" y="2487168"/>
+            <a:off x="1153212" y="2491740"/>
             <a:ext cx="365760" cy="365760"/>
           </a:xfrm>
           <a:prstGeom prst="ellipse">
@@ -40427,7 +41503,7 @@
         </p:nvSpPr>
         <p:spPr>
           <a:xfrm>
-            <a:off x="640080" y="2487168"/>
+            <a:off x="1153212" y="2491740"/>
             <a:ext cx="365760" cy="365760"/>
           </a:xfrm>
           <a:prstGeom prst="rect">
@@ -40463,7 +41539,7 @@
         </p:nvSpPr>
         <p:spPr>
           <a:xfrm>
-            <a:off x="1188720" y="2414016"/>
+            <a:off x="1676400" y="2439280"/>
             <a:ext cx="9875520" cy="512064"/>
           </a:xfrm>
           <a:prstGeom prst="rect">
@@ -40480,17 +41556,54 @@
               <a:buNone/>
             </a:pPr>
             <a:r>
-              <a:rPr lang="en-US" sz="1550">
-                <a:solidFill>
-                  <a:srgbClr val="E4EAF3"/>
-                </a:solidFill>
+              <a:rPr lang="en-US" sz="1550" dirty="0" err="1">
                 <a:latin typeface="Calibri" pitchFamily="34" charset="0"/>
                 <a:ea typeface="Calibri" pitchFamily="34" charset="-122"/>
                 <a:cs typeface="Calibri" pitchFamily="34" charset="-120"/>
               </a:rPr>
-              <a:t>Cómo se organiza un clúster EMR: master, core y task</a:t>
-            </a:r>
-            <a:endParaRPr lang="en-US" sz="1550"/>
+              <a:t>Cómo</a:t>
+            </a:r>
+            <a:r>
+              <a:rPr lang="en-US" sz="1550" dirty="0">
+                <a:latin typeface="Calibri" pitchFamily="34" charset="0"/>
+                <a:ea typeface="Calibri" pitchFamily="34" charset="-122"/>
+                <a:cs typeface="Calibri" pitchFamily="34" charset="-120"/>
+              </a:rPr>
+              <a:t> se </a:t>
+            </a:r>
+            <a:r>
+              <a:rPr lang="en-US" sz="1550" dirty="0" err="1">
+                <a:latin typeface="Calibri" pitchFamily="34" charset="0"/>
+                <a:ea typeface="Calibri" pitchFamily="34" charset="-122"/>
+                <a:cs typeface="Calibri" pitchFamily="34" charset="-120"/>
+              </a:rPr>
+              <a:t>organiza</a:t>
+            </a:r>
+            <a:r>
+              <a:rPr lang="en-US" sz="1550" dirty="0">
+                <a:latin typeface="Calibri" pitchFamily="34" charset="0"/>
+                <a:ea typeface="Calibri" pitchFamily="34" charset="-122"/>
+                <a:cs typeface="Calibri" pitchFamily="34" charset="-120"/>
+              </a:rPr>
+              <a:t> un </a:t>
+            </a:r>
+            <a:r>
+              <a:rPr lang="en-US" sz="1550" dirty="0" err="1">
+                <a:latin typeface="Calibri" pitchFamily="34" charset="0"/>
+                <a:ea typeface="Calibri" pitchFamily="34" charset="-122"/>
+                <a:cs typeface="Calibri" pitchFamily="34" charset="-120"/>
+              </a:rPr>
+              <a:t>clúster</a:t>
+            </a:r>
+            <a:r>
+              <a:rPr lang="en-US" sz="1550" dirty="0">
+                <a:latin typeface="Calibri" pitchFamily="34" charset="0"/>
+                <a:ea typeface="Calibri" pitchFamily="34" charset="-122"/>
+                <a:cs typeface="Calibri" pitchFamily="34" charset="-120"/>
+              </a:rPr>
+              <a:t> EMR: master, core y task</a:t>
+            </a:r>
+            <a:endParaRPr lang="en-US" sz="1550" dirty="0"/>
           </a:p>
         </p:txBody>
       </p:sp>
@@ -40502,7 +41615,7 @@
         </p:nvSpPr>
         <p:spPr>
           <a:xfrm>
-            <a:off x="640080" y="3145536"/>
+            <a:off x="1153212" y="3150108"/>
             <a:ext cx="365760" cy="365760"/>
           </a:xfrm>
           <a:prstGeom prst="ellipse">
@@ -40529,7 +41642,7 @@
         </p:nvSpPr>
         <p:spPr>
           <a:xfrm>
-            <a:off x="640080" y="3145536"/>
+            <a:off x="1153212" y="3150108"/>
             <a:ext cx="365760" cy="365760"/>
           </a:xfrm>
           <a:prstGeom prst="rect">
@@ -40565,7 +41678,7 @@
         </p:nvSpPr>
         <p:spPr>
           <a:xfrm>
-            <a:off x="1188720" y="3072384"/>
+            <a:off x="1810889" y="3081528"/>
             <a:ext cx="9875520" cy="512064"/>
           </a:xfrm>
           <a:prstGeom prst="rect">
@@ -40582,14 +41695,134 @@
               <a:buNone/>
             </a:pPr>
             <a:r>
-              <a:rPr lang="en-US" sz="1550">
+              <a:rPr lang="en-US" sz="1550" dirty="0" err="1">
                 <a:latin typeface="Calibri" pitchFamily="34" charset="0"/>
                 <a:ea typeface="Calibri" pitchFamily="34" charset="-122"/>
                 <a:cs typeface="Calibri" pitchFamily="34" charset="-120"/>
               </a:rPr>
-              <a:t>Cómo crear, asegurar y conectarte a un clúster desde tu propio PC</a:t>
-            </a:r>
-            <a:endParaRPr lang="en-US" sz="1550"/>
+              <a:t>Cómo</a:t>
+            </a:r>
+            <a:r>
+              <a:rPr lang="en-US" sz="1550" dirty="0">
+                <a:latin typeface="Calibri" pitchFamily="34" charset="0"/>
+                <a:ea typeface="Calibri" pitchFamily="34" charset="-122"/>
+                <a:cs typeface="Calibri" pitchFamily="34" charset="-120"/>
+              </a:rPr>
+              <a:t> </a:t>
+            </a:r>
+            <a:r>
+              <a:rPr lang="en-US" sz="1550" dirty="0" err="1">
+                <a:latin typeface="Calibri" pitchFamily="34" charset="0"/>
+                <a:ea typeface="Calibri" pitchFamily="34" charset="-122"/>
+                <a:cs typeface="Calibri" pitchFamily="34" charset="-120"/>
+              </a:rPr>
+              <a:t>crear</a:t>
+            </a:r>
+            <a:r>
+              <a:rPr lang="en-US" sz="1550" dirty="0">
+                <a:latin typeface="Calibri" pitchFamily="34" charset="0"/>
+                <a:ea typeface="Calibri" pitchFamily="34" charset="-122"/>
+                <a:cs typeface="Calibri" pitchFamily="34" charset="-120"/>
+              </a:rPr>
+              <a:t>, </a:t>
+            </a:r>
+            <a:r>
+              <a:rPr lang="en-US" sz="1550" dirty="0" err="1">
+                <a:latin typeface="Calibri" pitchFamily="34" charset="0"/>
+                <a:ea typeface="Calibri" pitchFamily="34" charset="-122"/>
+                <a:cs typeface="Calibri" pitchFamily="34" charset="-120"/>
+              </a:rPr>
+              <a:t>asegurar</a:t>
+            </a:r>
+            <a:r>
+              <a:rPr lang="en-US" sz="1550" dirty="0">
+                <a:latin typeface="Calibri" pitchFamily="34" charset="0"/>
+                <a:ea typeface="Calibri" pitchFamily="34" charset="-122"/>
+                <a:cs typeface="Calibri" pitchFamily="34" charset="-120"/>
+              </a:rPr>
+              <a:t> y </a:t>
+            </a:r>
+            <a:r>
+              <a:rPr lang="en-US" sz="1550" dirty="0" err="1">
+                <a:latin typeface="Calibri" pitchFamily="34" charset="0"/>
+                <a:ea typeface="Calibri" pitchFamily="34" charset="-122"/>
+                <a:cs typeface="Calibri" pitchFamily="34" charset="-120"/>
+              </a:rPr>
+              <a:t>conectarte</a:t>
+            </a:r>
+            <a:r>
+              <a:rPr lang="en-US" sz="1550" dirty="0">
+                <a:latin typeface="Calibri" pitchFamily="34" charset="0"/>
+                <a:ea typeface="Calibri" pitchFamily="34" charset="-122"/>
+                <a:cs typeface="Calibri" pitchFamily="34" charset="-120"/>
+              </a:rPr>
+              <a:t> a un </a:t>
+            </a:r>
+            <a:r>
+              <a:rPr lang="en-US" sz="1550" dirty="0" err="1">
+                <a:latin typeface="Calibri" pitchFamily="34" charset="0"/>
+                <a:ea typeface="Calibri" pitchFamily="34" charset="-122"/>
+                <a:cs typeface="Calibri" pitchFamily="34" charset="-120"/>
+              </a:rPr>
+              <a:t>clúster</a:t>
+            </a:r>
+            <a:r>
+              <a:rPr lang="en-US" sz="1550" dirty="0">
+                <a:latin typeface="Calibri" pitchFamily="34" charset="0"/>
+                <a:ea typeface="Calibri" pitchFamily="34" charset="-122"/>
+                <a:cs typeface="Calibri" pitchFamily="34" charset="-120"/>
+              </a:rPr>
+              <a:t> </a:t>
+            </a:r>
+            <a:r>
+              <a:rPr lang="en-US" sz="1550" dirty="0" err="1">
+                <a:latin typeface="Calibri" pitchFamily="34" charset="0"/>
+                <a:ea typeface="Calibri" pitchFamily="34" charset="-122"/>
+                <a:cs typeface="Calibri" pitchFamily="34" charset="-120"/>
+              </a:rPr>
+              <a:t>desde</a:t>
+            </a:r>
+            <a:r>
+              <a:rPr lang="en-US" sz="1550" dirty="0">
+                <a:latin typeface="Calibri" pitchFamily="34" charset="0"/>
+                <a:ea typeface="Calibri" pitchFamily="34" charset="-122"/>
+                <a:cs typeface="Calibri" pitchFamily="34" charset="-120"/>
+              </a:rPr>
+              <a:t> </a:t>
+            </a:r>
+            <a:r>
+              <a:rPr lang="en-US" sz="1550" dirty="0" err="1">
+                <a:latin typeface="Calibri" pitchFamily="34" charset="0"/>
+                <a:ea typeface="Calibri" pitchFamily="34" charset="-122"/>
+                <a:cs typeface="Calibri" pitchFamily="34" charset="-120"/>
+              </a:rPr>
+              <a:t>tu</a:t>
+            </a:r>
+            <a:r>
+              <a:rPr lang="en-US" sz="1550" dirty="0">
+                <a:latin typeface="Calibri" pitchFamily="34" charset="0"/>
+                <a:ea typeface="Calibri" pitchFamily="34" charset="-122"/>
+                <a:cs typeface="Calibri" pitchFamily="34" charset="-120"/>
+              </a:rPr>
+              <a:t> </a:t>
+            </a:r>
+            <a:r>
+              <a:rPr lang="en-US" sz="1550" dirty="0" err="1">
+                <a:latin typeface="Calibri" pitchFamily="34" charset="0"/>
+                <a:ea typeface="Calibri" pitchFamily="34" charset="-122"/>
+                <a:cs typeface="Calibri" pitchFamily="34" charset="-120"/>
+              </a:rPr>
+              <a:t>propio</a:t>
+            </a:r>
+            <a:r>
+              <a:rPr lang="en-US" sz="1550" dirty="0">
+                <a:latin typeface="Calibri" pitchFamily="34" charset="0"/>
+                <a:ea typeface="Calibri" pitchFamily="34" charset="-122"/>
+                <a:cs typeface="Calibri" pitchFamily="34" charset="-120"/>
+              </a:rPr>
+              <a:t> PC</a:t>
+            </a:r>
+            <a:endParaRPr lang="en-US" sz="1550" dirty="0"/>
           </a:p>
         </p:txBody>
       </p:sp>
@@ -40601,7 +41834,7 @@
         </p:nvSpPr>
         <p:spPr>
           <a:xfrm>
-            <a:off x="640080" y="3803904"/>
+            <a:off x="1153212" y="3808476"/>
             <a:ext cx="365760" cy="365760"/>
           </a:xfrm>
           <a:prstGeom prst="ellipse">
@@ -40628,7 +41861,7 @@
         </p:nvSpPr>
         <p:spPr>
           <a:xfrm>
-            <a:off x="640080" y="3803904"/>
+            <a:off x="1153212" y="3808476"/>
             <a:ext cx="365760" cy="365760"/>
           </a:xfrm>
           <a:prstGeom prst="rect">
@@ -40664,7 +41897,7 @@
         </p:nvSpPr>
         <p:spPr>
           <a:xfrm>
-            <a:off x="1188720" y="3730752"/>
+            <a:off x="1676400" y="3739896"/>
             <a:ext cx="9875520" cy="512064"/>
           </a:xfrm>
           <a:prstGeom prst="rect">
@@ -40681,14 +41914,118 @@
               <a:buNone/>
             </a:pPr>
             <a:r>
-              <a:rPr lang="en-US" sz="1550">
+              <a:rPr lang="en-US" sz="1550" dirty="0" err="1">
                 <a:latin typeface="Calibri" pitchFamily="34" charset="0"/>
                 <a:ea typeface="Calibri" pitchFamily="34" charset="-122"/>
                 <a:cs typeface="Calibri" pitchFamily="34" charset="-120"/>
               </a:rPr>
-              <a:t>Cómo entrenar y evaluar un modelo de ML con PySpark sobre datos reales</a:t>
-            </a:r>
-            <a:endParaRPr lang="en-US" sz="1550"/>
+              <a:t>Cómo</a:t>
+            </a:r>
+            <a:r>
+              <a:rPr lang="en-US" sz="1550" dirty="0">
+                <a:latin typeface="Calibri" pitchFamily="34" charset="0"/>
+                <a:ea typeface="Calibri" pitchFamily="34" charset="-122"/>
+                <a:cs typeface="Calibri" pitchFamily="34" charset="-120"/>
+              </a:rPr>
+              <a:t> </a:t>
+            </a:r>
+            <a:r>
+              <a:rPr lang="en-US" sz="1550" dirty="0" err="1">
+                <a:latin typeface="Calibri" pitchFamily="34" charset="0"/>
+                <a:ea typeface="Calibri" pitchFamily="34" charset="-122"/>
+                <a:cs typeface="Calibri" pitchFamily="34" charset="-120"/>
+              </a:rPr>
+              <a:t>entrenar</a:t>
+            </a:r>
+            <a:r>
+              <a:rPr lang="en-US" sz="1550" dirty="0">
+                <a:latin typeface="Calibri" pitchFamily="34" charset="0"/>
+                <a:ea typeface="Calibri" pitchFamily="34" charset="-122"/>
+                <a:cs typeface="Calibri" pitchFamily="34" charset="-120"/>
+              </a:rPr>
+              <a:t> y </a:t>
+            </a:r>
+            <a:r>
+              <a:rPr lang="en-US" sz="1550" dirty="0" err="1">
+                <a:latin typeface="Calibri" pitchFamily="34" charset="0"/>
+                <a:ea typeface="Calibri" pitchFamily="34" charset="-122"/>
+                <a:cs typeface="Calibri" pitchFamily="34" charset="-120"/>
+              </a:rPr>
+              <a:t>evaluar</a:t>
+            </a:r>
+            <a:r>
+              <a:rPr lang="en-US" sz="1550" dirty="0">
+                <a:latin typeface="Calibri" pitchFamily="34" charset="0"/>
+                <a:ea typeface="Calibri" pitchFamily="34" charset="-122"/>
+                <a:cs typeface="Calibri" pitchFamily="34" charset="-120"/>
+              </a:rPr>
+              <a:t> un </a:t>
+            </a:r>
+            <a:r>
+              <a:rPr lang="en-US" sz="1550" dirty="0" err="1">
+                <a:latin typeface="Calibri" pitchFamily="34" charset="0"/>
+                <a:ea typeface="Calibri" pitchFamily="34" charset="-122"/>
+                <a:cs typeface="Calibri" pitchFamily="34" charset="-120"/>
+              </a:rPr>
+              <a:t>modelo</a:t>
+            </a:r>
+            <a:r>
+              <a:rPr lang="en-US" sz="1550" dirty="0">
+                <a:latin typeface="Calibri" pitchFamily="34" charset="0"/>
+                <a:ea typeface="Calibri" pitchFamily="34" charset="-122"/>
+                <a:cs typeface="Calibri" pitchFamily="34" charset="-120"/>
+              </a:rPr>
+              <a:t> de ML con </a:t>
+            </a:r>
+            <a:r>
+              <a:rPr lang="en-US" sz="1550" dirty="0" err="1">
+                <a:latin typeface="Calibri" pitchFamily="34" charset="0"/>
+                <a:ea typeface="Calibri" pitchFamily="34" charset="-122"/>
+                <a:cs typeface="Calibri" pitchFamily="34" charset="-120"/>
+              </a:rPr>
+              <a:t>PySpark</a:t>
+            </a:r>
+            <a:r>
+              <a:rPr lang="en-US" sz="1550" dirty="0">
+                <a:latin typeface="Calibri" pitchFamily="34" charset="0"/>
+                <a:ea typeface="Calibri" pitchFamily="34" charset="-122"/>
+                <a:cs typeface="Calibri" pitchFamily="34" charset="-120"/>
+              </a:rPr>
+              <a:t> </a:t>
+            </a:r>
+            <a:r>
+              <a:rPr lang="en-US" sz="1550" dirty="0" err="1">
+                <a:latin typeface="Calibri" pitchFamily="34" charset="0"/>
+                <a:ea typeface="Calibri" pitchFamily="34" charset="-122"/>
+                <a:cs typeface="Calibri" pitchFamily="34" charset="-120"/>
+              </a:rPr>
+              <a:t>sobre</a:t>
+            </a:r>
+            <a:r>
+              <a:rPr lang="en-US" sz="1550" dirty="0">
+                <a:latin typeface="Calibri" pitchFamily="34" charset="0"/>
+                <a:ea typeface="Calibri" pitchFamily="34" charset="-122"/>
+                <a:cs typeface="Calibri" pitchFamily="34" charset="-120"/>
+              </a:rPr>
+              <a:t> </a:t>
+            </a:r>
+            <a:r>
+              <a:rPr lang="en-US" sz="1550" dirty="0" err="1">
+                <a:latin typeface="Calibri" pitchFamily="34" charset="0"/>
+                <a:ea typeface="Calibri" pitchFamily="34" charset="-122"/>
+                <a:cs typeface="Calibri" pitchFamily="34" charset="-120"/>
+              </a:rPr>
+              <a:t>datos</a:t>
+            </a:r>
+            <a:r>
+              <a:rPr lang="en-US" sz="1550" dirty="0">
+                <a:latin typeface="Calibri" pitchFamily="34" charset="0"/>
+                <a:ea typeface="Calibri" pitchFamily="34" charset="-122"/>
+                <a:cs typeface="Calibri" pitchFamily="34" charset="-120"/>
+              </a:rPr>
+              <a:t> reales</a:t>
+            </a:r>
+            <a:endParaRPr lang="en-US" sz="1550" dirty="0"/>
           </a:p>
         </p:txBody>
       </p:sp>
@@ -40720,14 +42057,230 @@
               <a:buNone/>
             </a:pPr>
             <a:r>
+              <a:rPr lang="en-US" sz="1400" i="1" dirty="0" err="1">
+                <a:latin typeface="Calibri" pitchFamily="34" charset="0"/>
+                <a:ea typeface="Calibri" pitchFamily="34" charset="-122"/>
+                <a:cs typeface="Calibri" pitchFamily="34" charset="-120"/>
+              </a:rPr>
+              <a:t>Próximo</a:t>
+            </a:r>
+            <a:r>
               <a:rPr lang="en-US" sz="1400" i="1">
                 <a:latin typeface="Calibri" pitchFamily="34" charset="0"/>
                 <a:ea typeface="Calibri" pitchFamily="34" charset="-122"/>
                 <a:cs typeface="Calibri" pitchFamily="34" charset="-120"/>
               </a:rPr>
-              <a:t>Próximo paso: cada estudiante crea su propio clúster EMR, ejecuta el pipeline completo con Peritazgo.csv y comparte su RMSE en el foro del curso.</a:t>
-            </a:r>
-            <a:endParaRPr lang="en-US" sz="1400"/>
+              <a:t> paso: </a:t>
+            </a:r>
+            <a:r>
+              <a:rPr lang="en-US" sz="1400" i="1" dirty="0" err="1">
+                <a:latin typeface="Calibri" pitchFamily="34" charset="0"/>
+                <a:ea typeface="Calibri" pitchFamily="34" charset="-122"/>
+                <a:cs typeface="Calibri" pitchFamily="34" charset="-120"/>
+              </a:rPr>
+              <a:t>cada</a:t>
+            </a:r>
+            <a:r>
+              <a:rPr lang="en-US" sz="1400" i="1" dirty="0">
+                <a:latin typeface="Calibri" pitchFamily="34" charset="0"/>
+                <a:ea typeface="Calibri" pitchFamily="34" charset="-122"/>
+                <a:cs typeface="Calibri" pitchFamily="34" charset="-120"/>
+              </a:rPr>
+              <a:t> </a:t>
+            </a:r>
+            <a:r>
+              <a:rPr lang="en-US" sz="1400" i="1" dirty="0" err="1">
+                <a:latin typeface="Calibri" pitchFamily="34" charset="0"/>
+                <a:ea typeface="Calibri" pitchFamily="34" charset="-122"/>
+                <a:cs typeface="Calibri" pitchFamily="34" charset="-120"/>
+              </a:rPr>
+              <a:t>estudiante</a:t>
+            </a:r>
+            <a:r>
+              <a:rPr lang="en-US" sz="1400" i="1" dirty="0">
+                <a:latin typeface="Calibri" pitchFamily="34" charset="0"/>
+                <a:ea typeface="Calibri" pitchFamily="34" charset="-122"/>
+                <a:cs typeface="Calibri" pitchFamily="34" charset="-120"/>
+              </a:rPr>
+              <a:t> </a:t>
+            </a:r>
+            <a:r>
+              <a:rPr lang="en-US" sz="1400" i="1" dirty="0" err="1">
+                <a:latin typeface="Calibri" pitchFamily="34" charset="0"/>
+                <a:ea typeface="Calibri" pitchFamily="34" charset="-122"/>
+                <a:cs typeface="Calibri" pitchFamily="34" charset="-120"/>
+              </a:rPr>
+              <a:t>crea</a:t>
+            </a:r>
+            <a:r>
+              <a:rPr lang="en-US" sz="1400" i="1" dirty="0">
+                <a:latin typeface="Calibri" pitchFamily="34" charset="0"/>
+                <a:ea typeface="Calibri" pitchFamily="34" charset="-122"/>
+                <a:cs typeface="Calibri" pitchFamily="34" charset="-120"/>
+              </a:rPr>
+              <a:t> </a:t>
+            </a:r>
+            <a:r>
+              <a:rPr lang="en-US" sz="1400" i="1" dirty="0" err="1">
+                <a:latin typeface="Calibri" pitchFamily="34" charset="0"/>
+                <a:ea typeface="Calibri" pitchFamily="34" charset="-122"/>
+                <a:cs typeface="Calibri" pitchFamily="34" charset="-120"/>
+              </a:rPr>
+              <a:t>su</a:t>
+            </a:r>
+            <a:r>
+              <a:rPr lang="en-US" sz="1400" i="1" dirty="0">
+                <a:latin typeface="Calibri" pitchFamily="34" charset="0"/>
+                <a:ea typeface="Calibri" pitchFamily="34" charset="-122"/>
+                <a:cs typeface="Calibri" pitchFamily="34" charset="-120"/>
+              </a:rPr>
+              <a:t> </a:t>
+            </a:r>
+            <a:r>
+              <a:rPr lang="en-US" sz="1400" i="1" dirty="0" err="1">
+                <a:latin typeface="Calibri" pitchFamily="34" charset="0"/>
+                <a:ea typeface="Calibri" pitchFamily="34" charset="-122"/>
+                <a:cs typeface="Calibri" pitchFamily="34" charset="-120"/>
+              </a:rPr>
+              <a:t>propio</a:t>
+            </a:r>
+            <a:r>
+              <a:rPr lang="en-US" sz="1400" i="1" dirty="0">
+                <a:latin typeface="Calibri" pitchFamily="34" charset="0"/>
+                <a:ea typeface="Calibri" pitchFamily="34" charset="-122"/>
+                <a:cs typeface="Calibri" pitchFamily="34" charset="-120"/>
+              </a:rPr>
+              <a:t> </a:t>
+            </a:r>
+            <a:r>
+              <a:rPr lang="en-US" sz="1400" i="1" dirty="0" err="1">
+                <a:latin typeface="Calibri" pitchFamily="34" charset="0"/>
+                <a:ea typeface="Calibri" pitchFamily="34" charset="-122"/>
+                <a:cs typeface="Calibri" pitchFamily="34" charset="-120"/>
+              </a:rPr>
+              <a:t>clúster</a:t>
+            </a:r>
+            <a:r>
+              <a:rPr lang="en-US" sz="1400" i="1" dirty="0">
+                <a:latin typeface="Calibri" pitchFamily="34" charset="0"/>
+                <a:ea typeface="Calibri" pitchFamily="34" charset="-122"/>
+                <a:cs typeface="Calibri" pitchFamily="34" charset="-120"/>
+              </a:rPr>
+              <a:t> EMR, </a:t>
+            </a:r>
+            <a:r>
+              <a:rPr lang="en-US" sz="1400" i="1" dirty="0" err="1">
+                <a:latin typeface="Calibri" pitchFamily="34" charset="0"/>
+                <a:ea typeface="Calibri" pitchFamily="34" charset="-122"/>
+                <a:cs typeface="Calibri" pitchFamily="34" charset="-120"/>
+              </a:rPr>
+              <a:t>ejecuta</a:t>
+            </a:r>
+            <a:r>
+              <a:rPr lang="en-US" sz="1400" i="1" dirty="0">
+                <a:latin typeface="Calibri" pitchFamily="34" charset="0"/>
+                <a:ea typeface="Calibri" pitchFamily="34" charset="-122"/>
+                <a:cs typeface="Calibri" pitchFamily="34" charset="-120"/>
+              </a:rPr>
+              <a:t> el pipeline </a:t>
+            </a:r>
+            <a:r>
+              <a:rPr lang="en-US" sz="1400" i="1" dirty="0" err="1">
+                <a:latin typeface="Calibri" pitchFamily="34" charset="0"/>
+                <a:ea typeface="Calibri" pitchFamily="34" charset="-122"/>
+                <a:cs typeface="Calibri" pitchFamily="34" charset="-120"/>
+              </a:rPr>
+              <a:t>completo</a:t>
+            </a:r>
+            <a:r>
+              <a:rPr lang="en-US" sz="1400" i="1" dirty="0">
+                <a:latin typeface="Calibri" pitchFamily="34" charset="0"/>
+                <a:ea typeface="Calibri" pitchFamily="34" charset="-122"/>
+                <a:cs typeface="Calibri" pitchFamily="34" charset="-120"/>
+              </a:rPr>
+              <a:t> con Peritazgo.csv y </a:t>
+            </a:r>
+            <a:r>
+              <a:rPr lang="en-US" sz="1400" i="1" dirty="0" err="1">
+                <a:latin typeface="Calibri" pitchFamily="34" charset="0"/>
+                <a:ea typeface="Calibri" pitchFamily="34" charset="-122"/>
+                <a:cs typeface="Calibri" pitchFamily="34" charset="-120"/>
+              </a:rPr>
+              <a:t>comparte</a:t>
+            </a:r>
+            <a:r>
+              <a:rPr lang="en-US" sz="1400" i="1" dirty="0">
+                <a:latin typeface="Calibri" pitchFamily="34" charset="0"/>
+                <a:ea typeface="Calibri" pitchFamily="34" charset="-122"/>
+                <a:cs typeface="Calibri" pitchFamily="34" charset="-120"/>
+              </a:rPr>
+              <a:t> </a:t>
+            </a:r>
+            <a:r>
+              <a:rPr lang="en-US" sz="1400" i="1" dirty="0" err="1">
+                <a:latin typeface="Calibri" pitchFamily="34" charset="0"/>
+                <a:ea typeface="Calibri" pitchFamily="34" charset="-122"/>
+                <a:cs typeface="Calibri" pitchFamily="34" charset="-120"/>
+              </a:rPr>
+              <a:t>su</a:t>
+            </a:r>
+            <a:r>
+              <a:rPr lang="en-US" sz="1400" i="1" dirty="0">
+                <a:latin typeface="Calibri" pitchFamily="34" charset="0"/>
+                <a:ea typeface="Calibri" pitchFamily="34" charset="-122"/>
+                <a:cs typeface="Calibri" pitchFamily="34" charset="-120"/>
+              </a:rPr>
+              <a:t> RMSE </a:t>
+            </a:r>
+            <a:r>
+              <a:rPr lang="en-US" sz="1400" i="1" dirty="0" err="1">
+                <a:latin typeface="Calibri" pitchFamily="34" charset="0"/>
+                <a:ea typeface="Calibri" pitchFamily="34" charset="-122"/>
+                <a:cs typeface="Calibri" pitchFamily="34" charset="-120"/>
+              </a:rPr>
+              <a:t>en</a:t>
+            </a:r>
+            <a:r>
+              <a:rPr lang="en-US" sz="1400" i="1" dirty="0">
+                <a:latin typeface="Calibri" pitchFamily="34" charset="0"/>
+                <a:ea typeface="Calibri" pitchFamily="34" charset="-122"/>
+                <a:cs typeface="Calibri" pitchFamily="34" charset="-120"/>
+              </a:rPr>
+              <a:t> el </a:t>
+            </a:r>
+            <a:r>
+              <a:rPr lang="en-US" sz="1400" i="1" dirty="0" err="1">
+                <a:latin typeface="Calibri" pitchFamily="34" charset="0"/>
+                <a:ea typeface="Calibri" pitchFamily="34" charset="-122"/>
+                <a:cs typeface="Calibri" pitchFamily="34" charset="-120"/>
+              </a:rPr>
+              <a:t>foro</a:t>
+            </a:r>
+            <a:r>
+              <a:rPr lang="en-US" sz="1400" i="1" dirty="0">
+                <a:latin typeface="Calibri" pitchFamily="34" charset="0"/>
+                <a:ea typeface="Calibri" pitchFamily="34" charset="-122"/>
+                <a:cs typeface="Calibri" pitchFamily="34" charset="-120"/>
+              </a:rPr>
+              <a:t> del </a:t>
+            </a:r>
+            <a:r>
+              <a:rPr lang="en-US" sz="1400" i="1" dirty="0" err="1">
+                <a:latin typeface="Calibri" pitchFamily="34" charset="0"/>
+                <a:ea typeface="Calibri" pitchFamily="34" charset="-122"/>
+                <a:cs typeface="Calibri" pitchFamily="34" charset="-120"/>
+              </a:rPr>
+              <a:t>curso</a:t>
+            </a:r>
+            <a:r>
+              <a:rPr lang="en-US" sz="1400" i="1" dirty="0">
+                <a:latin typeface="Calibri" pitchFamily="34" charset="0"/>
+                <a:ea typeface="Calibri" pitchFamily="34" charset="-122"/>
+                <a:cs typeface="Calibri" pitchFamily="34" charset="-120"/>
+              </a:rPr>
+              <a:t>.</a:t>
+            </a:r>
+            <a:endParaRPr lang="en-US" sz="1400" dirty="0"/>
           </a:p>
         </p:txBody>
       </p:sp>
@@ -40764,35 +42317,6 @@
               <a:t>Prof. Alfredo  ·  Centro de Competencias Digitales (CCD)  ·  UNAB</a:t>
             </a:r>
             <a:endParaRPr lang="en-US" sz="1150"/>
-          </a:p>
-        </p:txBody>
-      </p:sp>
-      <p:sp>
-        <p:nvSpPr>
-          <p:cNvPr id="20" name="Título 19">
-            <a:extLst>
-              <a:ext uri="{FF2B5EF4-FFF2-40B4-BE49-F238E27FC236}">
-                <a16:creationId xmlns:a16="http://schemas.microsoft.com/office/drawing/2014/main" id="{2D83C5E8-934E-32FD-08F8-9E8E4D3AF34C}"/>
-              </a:ext>
-            </a:extLst>
-          </p:cNvPr>
-          <p:cNvSpPr>
-            <a:spLocks noGrp="1"/>
-          </p:cNvSpPr>
-          <p:nvPr>
-            <p:ph type="title"/>
-          </p:nvPr>
-        </p:nvSpPr>
-        <p:spPr/>
-        <p:txBody>
-          <a:bodyPr/>
-          <a:lstStyle/>
-          <a:p>
-            <a:endParaRPr lang="es-CO">
-              <a:solidFill>
-                <a:schemeClr val="tx1"/>
-              </a:solidFill>
-            </a:endParaRPr>
           </a:p>
         </p:txBody>
       </p:sp>
